--- a/decks/Trans_03_Transfusion-Reactions.pptx
+++ b/decks/Trans_03_Transfusion-Reactions.pptx
@@ -38,8 +38,11 @@
     <p:sldId id="286" r:id="rId32"/>
     <p:sldId id="287" r:id="rId33"/>
     <p:sldId id="288" r:id="rId34"/>
+    <p:sldId id="295" r:id="rId46"/>
     <p:sldId id="289" r:id="rId35"/>
+    <p:sldId id="294" r:id="rId45"/>
     <p:sldId id="290" r:id="rId36"/>
+    <p:sldId id="293" r:id="rId44"/>
     <p:sldId id="291" r:id="rId37"/>
     <p:sldId id="292" r:id="rId38"/>
   </p:sldIdLst>
@@ -4100,6 +4103,10 @@
           </a:solidFill>
           <a:ln/>
         </p:spPr>
+        <p:txBody>
+          <a:bodyPr/>
+          <a:p/>
+        </p:txBody>
       </p:sp>
       <p:sp>
         <p:nvSpPr>
@@ -4122,6 +4129,10 @@
           </a:solidFill>
           <a:ln/>
         </p:spPr>
+        <p:txBody>
+          <a:bodyPr/>
+          <a:p/>
+        </p:txBody>
       </p:sp>
       <p:sp>
         <p:nvSpPr>
@@ -4144,6 +4155,10 @@
           </a:solidFill>
           <a:ln/>
         </p:spPr>
+        <p:txBody>
+          <a:bodyPr/>
+          <a:p/>
+        </p:txBody>
       </p:sp>
       <p:sp>
         <p:nvSpPr>
@@ -4166,6 +4181,10 @@
           </a:solidFill>
           <a:ln/>
         </p:spPr>
+        <p:txBody>
+          <a:bodyPr/>
+          <a:p/>
+        </p:txBody>
       </p:sp>
       <p:sp>
         <p:nvSpPr>
@@ -4582,6 +4601,10 @@
             </a:outerShdw>
           </a:effectLst>
         </p:spPr>
+        <p:txBody>
+          <a:bodyPr/>
+          <a:p/>
+        </p:txBody>
       </p:sp>
       <p:sp>
         <p:nvSpPr>
@@ -4761,6 +4784,10 @@
             </a:outerShdw>
           </a:effectLst>
         </p:spPr>
+        <p:txBody>
+          <a:bodyPr/>
+          <a:p/>
+        </p:txBody>
       </p:sp>
       <p:sp>
         <p:nvSpPr>
@@ -5198,6 +5225,10 @@
             </a:outerShdw>
           </a:effectLst>
         </p:spPr>
+        <p:txBody>
+          <a:bodyPr/>
+          <a:p/>
+        </p:txBody>
       </p:sp>
       <p:sp>
         <p:nvSpPr>
@@ -5393,6 +5424,10 @@
             </a:outerShdw>
           </a:effectLst>
         </p:spPr>
+        <p:txBody>
+          <a:bodyPr/>
+          <a:p/>
+        </p:txBody>
       </p:sp>
       <p:sp>
         <p:nvSpPr>
@@ -5783,6 +5818,10 @@
             </a:outerShdw>
           </a:effectLst>
         </p:spPr>
+        <p:txBody>
+          <a:bodyPr/>
+          <a:p/>
+        </p:txBody>
       </p:sp>
       <p:sp>
         <p:nvSpPr>
@@ -5941,6 +5980,10 @@
             </a:outerShdw>
           </a:effectLst>
         </p:spPr>
+        <p:txBody>
+          <a:bodyPr/>
+          <a:p/>
+        </p:txBody>
       </p:sp>
       <p:sp>
         <p:nvSpPr>
@@ -6336,6 +6379,10 @@
             </a:outerShdw>
           </a:effectLst>
         </p:spPr>
+        <p:txBody>
+          <a:bodyPr/>
+          <a:p/>
+        </p:txBody>
       </p:sp>
       <p:sp>
         <p:nvSpPr>
@@ -6510,6 +6557,10 @@
             </a:outerShdw>
           </a:effectLst>
         </p:spPr>
+        <p:txBody>
+          <a:bodyPr/>
+          <a:p/>
+        </p:txBody>
       </p:sp>
       <p:sp>
         <p:nvSpPr>
@@ -6900,6 +6951,10 @@
             </a:outerShdw>
           </a:effectLst>
         </p:spPr>
+        <p:txBody>
+          <a:bodyPr/>
+          <a:p/>
+        </p:txBody>
       </p:sp>
       <p:sp>
         <p:nvSpPr>
@@ -7058,6 +7113,10 @@
             </a:outerShdw>
           </a:effectLst>
         </p:spPr>
+        <p:txBody>
+          <a:bodyPr/>
+          <a:p/>
+        </p:txBody>
       </p:sp>
       <p:sp>
         <p:nvSpPr>
@@ -7448,6 +7507,10 @@
             </a:outerShdw>
           </a:effectLst>
         </p:spPr>
+        <p:txBody>
+          <a:bodyPr/>
+          <a:p/>
+        </p:txBody>
       </p:sp>
       <p:sp>
         <p:nvSpPr>
@@ -7627,6 +7690,10 @@
             </a:outerShdw>
           </a:effectLst>
         </p:spPr>
+        <p:txBody>
+          <a:bodyPr/>
+          <a:p/>
+        </p:txBody>
       </p:sp>
       <p:sp>
         <p:nvSpPr>
@@ -8017,6 +8084,10 @@
             </a:outerShdw>
           </a:effectLst>
         </p:spPr>
+        <p:txBody>
+          <a:bodyPr/>
+          <a:p/>
+        </p:txBody>
       </p:sp>
       <p:sp>
         <p:nvSpPr>
@@ -8196,6 +8267,10 @@
             </a:outerShdw>
           </a:effectLst>
         </p:spPr>
+        <p:txBody>
+          <a:bodyPr/>
+          <a:p/>
+        </p:txBody>
       </p:sp>
       <p:sp>
         <p:nvSpPr>
@@ -10847,6 +10922,10 @@
           </a:solidFill>
           <a:ln/>
         </p:spPr>
+        <p:txBody>
+          <a:bodyPr/>
+          <a:p/>
+        </p:txBody>
       </p:sp>
       <p:sp>
         <p:nvSpPr>
@@ -10869,6 +10948,10 @@
           </a:solidFill>
           <a:ln/>
         </p:spPr>
+        <p:txBody>
+          <a:bodyPr/>
+          <a:p/>
+        </p:txBody>
       </p:sp>
       <p:sp>
         <p:nvSpPr>
@@ -11125,6 +11208,10 @@
             </a:outerShdw>
           </a:effectLst>
         </p:spPr>
+        <p:txBody>
+          <a:bodyPr/>
+          <a:p/>
+        </p:txBody>
       </p:sp>
       <p:sp>
         <p:nvSpPr>
@@ -11304,6 +11391,10 @@
             </a:outerShdw>
           </a:effectLst>
         </p:spPr>
+        <p:txBody>
+          <a:bodyPr/>
+          <a:p/>
+        </p:txBody>
       </p:sp>
       <p:sp>
         <p:nvSpPr>
@@ -11694,6 +11785,10 @@
             </a:outerShdw>
           </a:effectLst>
         </p:spPr>
+        <p:txBody>
+          <a:bodyPr/>
+          <a:p/>
+        </p:txBody>
       </p:sp>
       <p:sp>
         <p:nvSpPr>
@@ -11801,6 +11896,10 @@
             </a:outerShdw>
           </a:effectLst>
         </p:spPr>
+        <p:txBody>
+          <a:bodyPr/>
+          <a:p/>
+        </p:txBody>
       </p:sp>
       <p:sp>
         <p:nvSpPr>
@@ -11908,6 +12007,10 @@
             </a:outerShdw>
           </a:effectLst>
         </p:spPr>
+        <p:txBody>
+          <a:bodyPr/>
+          <a:p/>
+        </p:txBody>
       </p:sp>
       <p:sp>
         <p:nvSpPr>
@@ -12015,6 +12118,10 @@
             </a:outerShdw>
           </a:effectLst>
         </p:spPr>
+        <p:txBody>
+          <a:bodyPr/>
+          <a:p/>
+        </p:txBody>
       </p:sp>
       <p:sp>
         <p:nvSpPr>
@@ -13558,6 +13665,10 @@
           </a:solidFill>
           <a:ln/>
         </p:spPr>
+        <p:txBody>
+          <a:bodyPr/>
+          <a:p/>
+        </p:txBody>
       </p:sp>
       <p:sp>
         <p:nvSpPr>
@@ -13580,6 +13691,10 @@
           </a:solidFill>
           <a:ln/>
         </p:spPr>
+        <p:txBody>
+          <a:bodyPr/>
+          <a:p/>
+        </p:txBody>
       </p:sp>
       <p:sp>
         <p:nvSpPr>
@@ -16826,6 +16941,10 @@
             </a:outerShdw>
           </a:effectLst>
         </p:spPr>
+        <p:txBody>
+          <a:bodyPr/>
+          <a:p/>
+        </p:txBody>
       </p:sp>
       <p:sp>
         <p:nvSpPr>
@@ -17000,6 +17119,10 @@
             </a:outerShdw>
           </a:effectLst>
         </p:spPr>
+        <p:txBody>
+          <a:bodyPr/>
+          <a:p/>
+        </p:txBody>
       </p:sp>
       <p:sp>
         <p:nvSpPr>
@@ -18655,6 +18778,10 @@
           </a:solidFill>
           <a:ln/>
         </p:spPr>
+        <p:txBody>
+          <a:bodyPr/>
+          <a:p/>
+        </p:txBody>
       </p:sp>
       <p:sp>
         <p:nvSpPr>
@@ -18677,6 +18804,10 @@
           </a:solidFill>
           <a:ln/>
         </p:spPr>
+        <p:txBody>
+          <a:bodyPr/>
+          <a:p/>
+        </p:txBody>
       </p:sp>
       <p:sp>
         <p:nvSpPr>
@@ -18933,6 +19064,10 @@
             </a:outerShdw>
           </a:effectLst>
         </p:spPr>
+        <p:txBody>
+          <a:bodyPr/>
+          <a:p/>
+        </p:txBody>
       </p:sp>
       <p:sp>
         <p:nvSpPr>
@@ -19043,6 +19178,10 @@
             </a:outerShdw>
           </a:effectLst>
         </p:spPr>
+        <p:txBody>
+          <a:bodyPr/>
+          <a:p/>
+        </p:txBody>
       </p:sp>
       <p:sp>
         <p:nvSpPr>
@@ -19493,6 +19632,10 @@
             </a:outerShdw>
           </a:effectLst>
         </p:spPr>
+        <p:txBody>
+          <a:bodyPr/>
+          <a:p/>
+        </p:txBody>
       </p:sp>
       <p:sp>
         <p:nvSpPr>
@@ -19819,6 +19962,10 @@
             </a:outerShdw>
           </a:effectLst>
         </p:spPr>
+        <p:txBody>
+          <a:bodyPr/>
+          <a:p/>
+        </p:txBody>
       </p:sp>
       <p:sp>
         <p:nvSpPr>
@@ -19929,6 +20076,10 @@
             </a:outerShdw>
           </a:effectLst>
         </p:spPr>
+        <p:txBody>
+          <a:bodyPr/>
+          <a:p/>
+        </p:txBody>
       </p:sp>
       <p:sp>
         <p:nvSpPr>
@@ -20379,6 +20530,10 @@
             </a:outerShdw>
           </a:effectLst>
         </p:spPr>
+        <p:txBody>
+          <a:bodyPr/>
+          <a:p/>
+        </p:txBody>
       </p:sp>
       <p:sp>
         <p:nvSpPr>
@@ -20705,6 +20860,10 @@
             </a:outerShdw>
           </a:effectLst>
         </p:spPr>
+        <p:txBody>
+          <a:bodyPr/>
+          <a:p/>
+        </p:txBody>
       </p:sp>
       <p:sp>
         <p:nvSpPr>
@@ -20732,6 +20891,10 @@
             </a:outerShdw>
           </a:effectLst>
         </p:spPr>
+        <p:txBody>
+          <a:bodyPr/>
+          <a:p/>
+        </p:txBody>
       </p:sp>
       <p:sp>
         <p:nvSpPr>
@@ -20839,6 +21002,10 @@
             </a:outerShdw>
           </a:effectLst>
         </p:spPr>
+        <p:txBody>
+          <a:bodyPr/>
+          <a:p/>
+        </p:txBody>
       </p:sp>
       <p:sp>
         <p:nvSpPr>
@@ -20866,6 +21033,10 @@
             </a:outerShdw>
           </a:effectLst>
         </p:spPr>
+        <p:txBody>
+          <a:bodyPr/>
+          <a:p/>
+        </p:txBody>
       </p:sp>
       <p:sp>
         <p:nvSpPr>
@@ -20973,6 +21144,10 @@
             </a:outerShdw>
           </a:effectLst>
         </p:spPr>
+        <p:txBody>
+          <a:bodyPr/>
+          <a:p/>
+        </p:txBody>
       </p:sp>
       <p:sp>
         <p:nvSpPr>
@@ -21000,6 +21175,10 @@
             </a:outerShdw>
           </a:effectLst>
         </p:spPr>
+        <p:txBody>
+          <a:bodyPr/>
+          <a:p/>
+        </p:txBody>
       </p:sp>
       <p:sp>
         <p:nvSpPr>
@@ -21107,6 +21286,10 @@
             </a:outerShdw>
           </a:effectLst>
         </p:spPr>
+        <p:txBody>
+          <a:bodyPr/>
+          <a:p/>
+        </p:txBody>
       </p:sp>
       <p:sp>
         <p:nvSpPr>
@@ -21134,6 +21317,10 @@
             </a:outerShdw>
           </a:effectLst>
         </p:spPr>
+        <p:txBody>
+          <a:bodyPr/>
+          <a:p/>
+        </p:txBody>
       </p:sp>
       <p:sp>
         <p:nvSpPr>
@@ -21241,6 +21428,10 @@
             </a:outerShdw>
           </a:effectLst>
         </p:spPr>
+        <p:txBody>
+          <a:bodyPr/>
+          <a:p/>
+        </p:txBody>
       </p:sp>
       <p:sp>
         <p:nvSpPr>
@@ -21268,6 +21459,10 @@
             </a:outerShdw>
           </a:effectLst>
         </p:spPr>
+        <p:txBody>
+          <a:bodyPr/>
+          <a:p/>
+        </p:txBody>
       </p:sp>
       <p:sp>
         <p:nvSpPr>
@@ -21375,6 +21570,10 @@
             </a:outerShdw>
           </a:effectLst>
         </p:spPr>
+        <p:txBody>
+          <a:bodyPr/>
+          <a:p/>
+        </p:txBody>
       </p:sp>
       <p:sp>
         <p:nvSpPr>
@@ -21402,6 +21601,10 @@
             </a:outerShdw>
           </a:effectLst>
         </p:spPr>
+        <p:txBody>
+          <a:bodyPr/>
+          <a:p/>
+        </p:txBody>
       </p:sp>
       <p:sp>
         <p:nvSpPr>
@@ -21725,6 +21928,10 @@
             </a:outerShdw>
           </a:effectLst>
         </p:spPr>
+        <p:txBody>
+          <a:bodyPr/>
+          <a:p/>
+        </p:txBody>
       </p:sp>
       <p:sp>
         <p:nvSpPr>
@@ -21835,6 +22042,10 @@
             </a:outerShdw>
           </a:effectLst>
         </p:spPr>
+        <p:txBody>
+          <a:bodyPr/>
+          <a:p/>
+        </p:txBody>
       </p:sp>
       <p:sp>
         <p:nvSpPr>
@@ -22264,6 +22475,10 @@
             </a:outerShdw>
           </a:effectLst>
         </p:spPr>
+        <p:txBody>
+          <a:bodyPr/>
+          <a:p/>
+        </p:txBody>
       </p:sp>
       <p:sp>
         <p:nvSpPr>
@@ -22505,6 +22720,10 @@
           </a:solidFill>
           <a:ln/>
         </p:spPr>
+        <p:txBody>
+          <a:bodyPr/>
+          <a:p/>
+        </p:txBody>
       </p:sp>
       <p:sp>
         <p:nvSpPr>
@@ -22527,6 +22746,10 @@
           </a:solidFill>
           <a:ln/>
         </p:spPr>
+        <p:txBody>
+          <a:bodyPr/>
+          <a:p/>
+        </p:txBody>
       </p:sp>
       <p:sp>
         <p:nvSpPr>
@@ -22865,9 +23088,9 @@
               <a:buNone/>
             </a:pPr>
             <a:r>
-              <a:rPr lang="en-US" sz="1350" b="1" dirty="0">
-                <a:solidFill>
-                  <a:srgbClr val="7A0E3C"/>
+              <a:rPr lang="en-US" sz="1350" b="0" dirty="0">
+                <a:solidFill>
+                  <a:srgbClr val="33444F"/>
                 </a:solidFill>
                 <a:latin typeface="Calibri" pitchFamily="34" charset="0"/>
                 <a:ea typeface="Calibri" pitchFamily="34" charset="-122"/>
@@ -22916,130 +23139,6 @@
               <a:t>E. Recipient IgA deficiency with anti-IgA</a:t>
             </a:r>
             <a:endParaRPr lang="en-US" sz="1350" dirty="0"/>
-          </a:p>
-        </p:txBody>
-      </p:sp>
-      <p:sp>
-        <p:nvSpPr>
-          <p:cNvPr id="6" name="Shape 4"/>
-          <p:cNvSpPr/>
-          <p:nvPr/>
-        </p:nvSpPr>
-        <p:spPr>
-          <a:xfrm>
-            <a:off x="7201632" y="2395728"/>
-            <a:ext cx="4423136" cy="3246120"/>
-          </a:xfrm>
-          <a:prstGeom prst="roundRect">
-            <a:avLst>
-              <a:gd name="adj" fmla="val 2535"/>
-            </a:avLst>
-          </a:prstGeom>
-          <a:solidFill>
-            <a:srgbClr val="F8E7EF"/>
-          </a:solidFill>
-          <a:ln/>
-          <a:effectLst>
-            <a:outerShdw sx="100000" sy="100000" kx="0" ky="0" algn="bl" rotWithShape="0" blurRad="88900" dist="25400" dir="5400000">
-              <a:srgbClr val="22303C">
-                <a:alpha val="12000"/>
-              </a:srgbClr>
-            </a:outerShdw>
-          </a:effectLst>
-        </p:spPr>
-      </p:sp>
-      <p:sp>
-        <p:nvSpPr>
-          <p:cNvPr id="7" name="Text 5"/>
-          <p:cNvSpPr/>
-          <p:nvPr/>
-        </p:nvSpPr>
-        <p:spPr>
-          <a:xfrm>
-            <a:off x="7439376" y="2578608"/>
-            <a:ext cx="3965936" cy="457200"/>
-          </a:xfrm>
-          <a:prstGeom prst="rect">
-            <a:avLst/>
-          </a:prstGeom>
-          <a:noFill/>
-          <a:ln/>
-        </p:spPr>
-        <p:txBody>
-          <a:bodyPr wrap="square" lIns="0" tIns="0" rIns="0" bIns="0" rtlCol="0" anchor="ctr"/>
-          <a:lstStyle/>
-          <a:p>
-            <a:pPr indent="0" marL="0">
-              <a:buNone/>
-            </a:pPr>
-            <a:r>
-              <a:rPr lang="en-US" sz="1500" b="1" dirty="0">
-                <a:solidFill>
-                  <a:srgbClr val="AD1457"/>
-                </a:solidFill>
-                <a:latin typeface="Calibri" pitchFamily="34" charset="0"/>
-                <a:ea typeface="Calibri" pitchFamily="34" charset="-122"/>
-                <a:cs typeface="Calibri" pitchFamily="34" charset="-120"/>
-              </a:rPr>
-              <a:t>ANSWER  </a:t>
-            </a:r>
-            <a:pPr indent="0" marL="0">
-              <a:buNone/>
-            </a:pPr>
-            <a:r>
-              <a:rPr lang="en-US" sz="1500" b="1" dirty="0">
-                <a:solidFill>
-                  <a:srgbClr val="1B2A38"/>
-                </a:solidFill>
-                <a:latin typeface="Calibri" pitchFamily="34" charset="0"/>
-                <a:ea typeface="Calibri" pitchFamily="34" charset="-122"/>
-                <a:cs typeface="Calibri" pitchFamily="34" charset="-120"/>
-              </a:rPr>
-              <a:t>C — Patient/sample misidentification (ABO incompatibility)</a:t>
-            </a:r>
-            <a:endParaRPr lang="en-US" sz="1500" dirty="0"/>
-          </a:p>
-        </p:txBody>
-      </p:sp>
-      <p:sp>
-        <p:nvSpPr>
-          <p:cNvPr id="8" name="Text 6"/>
-          <p:cNvSpPr/>
-          <p:nvPr/>
-        </p:nvSpPr>
-        <p:spPr>
-          <a:xfrm>
-            <a:off x="7439376" y="3127248"/>
-            <a:ext cx="3947648" cy="2377440"/>
-          </a:xfrm>
-          <a:prstGeom prst="rect">
-            <a:avLst/>
-          </a:prstGeom>
-          <a:noFill/>
-          <a:ln/>
-        </p:spPr>
-        <p:txBody>
-          <a:bodyPr wrap="square" lIns="0" tIns="0" rIns="0" bIns="0" rtlCol="0" anchor="t"/>
-          <a:lstStyle/>
-          <a:p>
-            <a:pPr algn="l" indent="0" marL="0">
-              <a:lnSpc>
-                <a:spcPct val="108000"/>
-              </a:lnSpc>
-              <a:buNone/>
-            </a:pPr>
-            <a:r>
-              <a:rPr lang="en-US" sz="1250" dirty="0">
-                <a:solidFill>
-                  <a:srgbClr val="33444F"/>
-                </a:solidFill>
-                <a:latin typeface="Calibri" pitchFamily="34" charset="0"/>
-                <a:ea typeface="Calibri" pitchFamily="34" charset="-122"/>
-                <a:cs typeface="Calibri" pitchFamily="34" charset="-120"/>
-              </a:rPr>
-              <a:t>This is an acute hemolytic transfusion reaction. The overwhelming majority result from clerical / identification errors leading to ABO-incompatible transfusion. (A) causes delayed hemolysis; (B) is septic; (D) is TRALI; (E) is anaphylaxis.</a:t>
-            </a:r>
-            <a:endParaRPr lang="en-US" sz="1250" dirty="0"/>
           </a:p>
         </p:txBody>
       </p:sp>
@@ -23349,9 +23448,9 @@
               <a:buNone/>
             </a:pPr>
             <a:r>
-              <a:rPr lang="en-US" sz="1350" b="1" dirty="0">
-                <a:solidFill>
-                  <a:srgbClr val="7A0E3C"/>
+              <a:rPr lang="en-US" sz="1350" b="0" dirty="0">
+                <a:solidFill>
+                  <a:srgbClr val="33444F"/>
                 </a:solidFill>
                 <a:latin typeface="Calibri" pitchFamily="34" charset="0"/>
                 <a:ea typeface="Calibri" pitchFamily="34" charset="-122"/>
@@ -23420,130 +23519,6 @@
               <a:t>E. Lung-protective ventilation without diuretics</a:t>
             </a:r>
             <a:endParaRPr lang="en-US" sz="1350" dirty="0"/>
-          </a:p>
-        </p:txBody>
-      </p:sp>
-      <p:sp>
-        <p:nvSpPr>
-          <p:cNvPr id="6" name="Shape 4"/>
-          <p:cNvSpPr/>
-          <p:nvPr/>
-        </p:nvSpPr>
-        <p:spPr>
-          <a:xfrm>
-            <a:off x="7201632" y="2395728"/>
-            <a:ext cx="4423136" cy="3246120"/>
-          </a:xfrm>
-          <a:prstGeom prst="roundRect">
-            <a:avLst>
-              <a:gd name="adj" fmla="val 2535"/>
-            </a:avLst>
-          </a:prstGeom>
-          <a:solidFill>
-            <a:srgbClr val="F8E7EF"/>
-          </a:solidFill>
-          <a:ln/>
-          <a:effectLst>
-            <a:outerShdw sx="100000" sy="100000" kx="0" ky="0" algn="bl" rotWithShape="0" blurRad="88900" dist="25400" dir="5400000">
-              <a:srgbClr val="22303C">
-                <a:alpha val="12000"/>
-              </a:srgbClr>
-            </a:outerShdw>
-          </a:effectLst>
-        </p:spPr>
-      </p:sp>
-      <p:sp>
-        <p:nvSpPr>
-          <p:cNvPr id="7" name="Text 5"/>
-          <p:cNvSpPr/>
-          <p:nvPr/>
-        </p:nvSpPr>
-        <p:spPr>
-          <a:xfrm>
-            <a:off x="7439376" y="2578608"/>
-            <a:ext cx="3965936" cy="457200"/>
-          </a:xfrm>
-          <a:prstGeom prst="rect">
-            <a:avLst/>
-          </a:prstGeom>
-          <a:noFill/>
-          <a:ln/>
-        </p:spPr>
-        <p:txBody>
-          <a:bodyPr wrap="square" lIns="0" tIns="0" rIns="0" bIns="0" rtlCol="0" anchor="ctr"/>
-          <a:lstStyle/>
-          <a:p>
-            <a:pPr indent="0" marL="0">
-              <a:buNone/>
-            </a:pPr>
-            <a:r>
-              <a:rPr lang="en-US" sz="1500" b="1" dirty="0">
-                <a:solidFill>
-                  <a:srgbClr val="AD1457"/>
-                </a:solidFill>
-                <a:latin typeface="Calibri" pitchFamily="34" charset="0"/>
-                <a:ea typeface="Calibri" pitchFamily="34" charset="-122"/>
-                <a:cs typeface="Calibri" pitchFamily="34" charset="-120"/>
-              </a:rPr>
-              <a:t>ANSWER  </a:t>
-            </a:r>
-            <a:pPr indent="0" marL="0">
-              <a:buNone/>
-            </a:pPr>
-            <a:r>
-              <a:rPr lang="en-US" sz="1500" b="1" dirty="0">
-                <a:solidFill>
-                  <a:srgbClr val="1B2A38"/>
-                </a:solidFill>
-                <a:latin typeface="Calibri" pitchFamily="34" charset="0"/>
-                <a:ea typeface="Calibri" pitchFamily="34" charset="-122"/>
-                <a:cs typeface="Calibri" pitchFamily="34" charset="-120"/>
-              </a:rPr>
-              <a:t>B — Diuresis, upright positioning, and oxygen</a:t>
-            </a:r>
-            <a:endParaRPr lang="en-US" sz="1500" dirty="0"/>
-          </a:p>
-        </p:txBody>
-      </p:sp>
-      <p:sp>
-        <p:nvSpPr>
-          <p:cNvPr id="8" name="Text 6"/>
-          <p:cNvSpPr/>
-          <p:nvPr/>
-        </p:nvSpPr>
-        <p:spPr>
-          <a:xfrm>
-            <a:off x="7439376" y="3127248"/>
-            <a:ext cx="3947648" cy="2377440"/>
-          </a:xfrm>
-          <a:prstGeom prst="rect">
-            <a:avLst/>
-          </a:prstGeom>
-          <a:noFill/>
-          <a:ln/>
-        </p:spPr>
-        <p:txBody>
-          <a:bodyPr wrap="square" lIns="0" tIns="0" rIns="0" bIns="0" rtlCol="0" anchor="t"/>
-          <a:lstStyle/>
-          <a:p>
-            <a:pPr algn="l" indent="0" marL="0">
-              <a:lnSpc>
-                <a:spcPct val="108000"/>
-              </a:lnSpc>
-              <a:buNone/>
-            </a:pPr>
-            <a:r>
-              <a:rPr lang="en-US" sz="1250" dirty="0">
-                <a:solidFill>
-                  <a:srgbClr val="33444F"/>
-                </a:solidFill>
-                <a:latin typeface="Calibri" pitchFamily="34" charset="0"/>
-                <a:ea typeface="Calibri" pitchFamily="34" charset="-122"/>
-                <a:cs typeface="Calibri" pitchFamily="34" charset="-120"/>
-              </a:rPr>
-              <a:t>Hypertension, raised JVP, and elevated BNP indicate TACO (hydrostatic overload), which responds to diuresis. (E) describes TRALI management; (C) septic; (A) anaphylaxis; (D) prevents TA-GVHD.</a:t>
-            </a:r>
-            <a:endParaRPr lang="en-US" sz="1250" dirty="0"/>
           </a:p>
         </p:txBody>
       </p:sp>
@@ -23873,9 +23848,9 @@
               <a:buNone/>
             </a:pPr>
             <a:r>
-              <a:rPr lang="en-US" sz="1350" b="1" dirty="0">
-                <a:solidFill>
-                  <a:srgbClr val="7A0E3C"/>
+              <a:rPr lang="en-US" sz="1350" b="0" dirty="0">
+                <a:solidFill>
+                  <a:srgbClr val="33444F"/>
                 </a:solidFill>
                 <a:latin typeface="Calibri" pitchFamily="34" charset="0"/>
                 <a:ea typeface="Calibri" pitchFamily="34" charset="-122"/>
@@ -23924,130 +23899,6 @@
               <a:t>E. Pathogen reduction for bacterial risk</a:t>
             </a:r>
             <a:endParaRPr lang="en-US" sz="1350" dirty="0"/>
-          </a:p>
-        </p:txBody>
-      </p:sp>
-      <p:sp>
-        <p:nvSpPr>
-          <p:cNvPr id="6" name="Shape 4"/>
-          <p:cNvSpPr/>
-          <p:nvPr/>
-        </p:nvSpPr>
-        <p:spPr>
-          <a:xfrm>
-            <a:off x="7201632" y="2395728"/>
-            <a:ext cx="4423136" cy="3246120"/>
-          </a:xfrm>
-          <a:prstGeom prst="roundRect">
-            <a:avLst>
-              <a:gd name="adj" fmla="val 2535"/>
-            </a:avLst>
-          </a:prstGeom>
-          <a:solidFill>
-            <a:srgbClr val="F8E7EF"/>
-          </a:solidFill>
-          <a:ln/>
-          <a:effectLst>
-            <a:outerShdw sx="100000" sy="100000" kx="0" ky="0" algn="bl" rotWithShape="0" blurRad="88900" dist="25400" dir="5400000">
-              <a:srgbClr val="22303C">
-                <a:alpha val="12000"/>
-              </a:srgbClr>
-            </a:outerShdw>
-          </a:effectLst>
-        </p:spPr>
-      </p:sp>
-      <p:sp>
-        <p:nvSpPr>
-          <p:cNvPr id="7" name="Text 5"/>
-          <p:cNvSpPr/>
-          <p:nvPr/>
-        </p:nvSpPr>
-        <p:spPr>
-          <a:xfrm>
-            <a:off x="7439376" y="2578608"/>
-            <a:ext cx="3965936" cy="457200"/>
-          </a:xfrm>
-          <a:prstGeom prst="rect">
-            <a:avLst/>
-          </a:prstGeom>
-          <a:noFill/>
-          <a:ln/>
-        </p:spPr>
-        <p:txBody>
-          <a:bodyPr wrap="square" lIns="0" tIns="0" rIns="0" bIns="0" rtlCol="0" anchor="ctr"/>
-          <a:lstStyle/>
-          <a:p>
-            <a:pPr indent="0" marL="0">
-              <a:buNone/>
-            </a:pPr>
-            <a:r>
-              <a:rPr lang="en-US" sz="1500" b="1" dirty="0">
-                <a:solidFill>
-                  <a:srgbClr val="AD1457"/>
-                </a:solidFill>
-                <a:latin typeface="Calibri" pitchFamily="34" charset="0"/>
-                <a:ea typeface="Calibri" pitchFamily="34" charset="-122"/>
-                <a:cs typeface="Calibri" pitchFamily="34" charset="-120"/>
-              </a:rPr>
-              <a:t>ANSWER  </a:t>
-            </a:r>
-            <a:pPr indent="0" marL="0">
-              <a:buNone/>
-            </a:pPr>
-            <a:r>
-              <a:rPr lang="en-US" sz="1500" b="1" dirty="0">
-                <a:solidFill>
-                  <a:srgbClr val="1B2A38"/>
-                </a:solidFill>
-                <a:latin typeface="Calibri" pitchFamily="34" charset="0"/>
-                <a:ea typeface="Calibri" pitchFamily="34" charset="-122"/>
-                <a:cs typeface="Calibri" pitchFamily="34" charset="-120"/>
-              </a:rPr>
-              <a:t>C — Irradiation of cellular components</a:t>
-            </a:r>
-            <a:endParaRPr lang="en-US" sz="1500" dirty="0"/>
-          </a:p>
-        </p:txBody>
-      </p:sp>
-      <p:sp>
-        <p:nvSpPr>
-          <p:cNvPr id="8" name="Text 6"/>
-          <p:cNvSpPr/>
-          <p:nvPr/>
-        </p:nvSpPr>
-        <p:spPr>
-          <a:xfrm>
-            <a:off x="7439376" y="3127248"/>
-            <a:ext cx="3947648" cy="2377440"/>
-          </a:xfrm>
-          <a:prstGeom prst="rect">
-            <a:avLst/>
-          </a:prstGeom>
-          <a:noFill/>
-          <a:ln/>
-        </p:spPr>
-        <p:txBody>
-          <a:bodyPr wrap="square" lIns="0" tIns="0" rIns="0" bIns="0" rtlCol="0" anchor="t"/>
-          <a:lstStyle/>
-          <a:p>
-            <a:pPr algn="l" indent="0" marL="0">
-              <a:lnSpc>
-                <a:spcPct val="108000"/>
-              </a:lnSpc>
-              <a:buNone/>
-            </a:pPr>
-            <a:r>
-              <a:rPr lang="en-US" sz="1250" dirty="0">
-                <a:solidFill>
-                  <a:srgbClr val="33444F"/>
-                </a:solidFill>
-                <a:latin typeface="Calibri" pitchFamily="34" charset="0"/>
-                <a:ea typeface="Calibri" pitchFamily="34" charset="-122"/>
-                <a:cs typeface="Calibri" pitchFamily="34" charset="-120"/>
-              </a:rPr>
-              <a:t>TA-GVHD is caused by viable donor T-lymphocytes; irradiation inactivates them and is the required preventive step. Leukoreduction reduces FNHTR, HLA alloimmunization, and CMV risk but does NOT reliably prevent TA-GVHD.</a:t>
-            </a:r>
-            <a:endParaRPr lang="en-US" sz="1250" dirty="0"/>
           </a:p>
         </p:txBody>
       </p:sp>
@@ -24288,6 +24139,10 @@
           </a:solidFill>
           <a:ln/>
         </p:spPr>
+        <p:txBody>
+          <a:bodyPr/>
+          <a:p/>
+        </p:txBody>
       </p:sp>
       <p:sp>
         <p:nvSpPr>
@@ -24315,6 +24170,10 @@
             </a:outerShdw>
           </a:effectLst>
         </p:spPr>
+        <p:txBody>
+          <a:bodyPr/>
+          <a:p/>
+        </p:txBody>
       </p:sp>
       <p:sp>
         <p:nvSpPr>
@@ -24415,6 +24274,10 @@
           </a:solidFill>
           <a:ln/>
         </p:spPr>
+        <p:txBody>
+          <a:bodyPr/>
+          <a:p/>
+        </p:txBody>
       </p:sp>
       <p:sp>
         <p:nvSpPr>
@@ -24442,6 +24305,10 @@
             </a:outerShdw>
           </a:effectLst>
         </p:spPr>
+        <p:txBody>
+          <a:bodyPr/>
+          <a:p/>
+        </p:txBody>
       </p:sp>
       <p:sp>
         <p:nvSpPr>
@@ -24542,6 +24409,10 @@
           </a:solidFill>
           <a:ln/>
         </p:spPr>
+        <p:txBody>
+          <a:bodyPr/>
+          <a:p/>
+        </p:txBody>
       </p:sp>
       <p:sp>
         <p:nvSpPr>
@@ -24569,6 +24440,10 @@
             </a:outerShdw>
           </a:effectLst>
         </p:spPr>
+        <p:txBody>
+          <a:bodyPr/>
+          <a:p/>
+        </p:txBody>
       </p:sp>
       <p:sp>
         <p:nvSpPr>
@@ -24669,6 +24544,10 @@
           </a:solidFill>
           <a:ln/>
         </p:spPr>
+        <p:txBody>
+          <a:bodyPr/>
+          <a:p/>
+        </p:txBody>
       </p:sp>
       <p:sp>
         <p:nvSpPr>
@@ -24696,6 +24575,10 @@
             </a:outerShdw>
           </a:effectLst>
         </p:spPr>
+        <p:txBody>
+          <a:bodyPr/>
+          <a:p/>
+        </p:txBody>
       </p:sp>
       <p:sp>
         <p:nvSpPr>
@@ -24796,6 +24679,10 @@
           </a:solidFill>
           <a:ln/>
         </p:spPr>
+        <p:txBody>
+          <a:bodyPr/>
+          <a:p/>
+        </p:txBody>
       </p:sp>
       <p:sp>
         <p:nvSpPr>
@@ -24823,6 +24710,10 @@
             </a:outerShdw>
           </a:effectLst>
         </p:spPr>
+        <p:txBody>
+          <a:bodyPr/>
+          <a:p/>
+        </p:txBody>
       </p:sp>
       <p:sp>
         <p:nvSpPr>
@@ -25346,6 +25237,994 @@
 </p:sld>
 </file>
 
+<file path=ppt/slides/slide38.xml><?xml version="1.0" encoding="utf-8"?>
+<p:sld xmlns:a="http://schemas.openxmlformats.org/drawingml/2006/main" xmlns:p="http://schemas.openxmlformats.org/presentationml/2006/main" xmlns:r="http://schemas.openxmlformats.org/officeDocument/2006/relationships">
+  <p:cSld>
+    <p:spTree>
+      <p:nvGrpSpPr>
+        <p:cNvPr id="1" name=""/>
+        <p:cNvGrpSpPr/>
+        <p:nvPr/>
+      </p:nvGrpSpPr>
+      <p:grpSpPr/>
+      <p:sp>
+        <p:nvSpPr>
+          <p:cNvPr id="2" name="Text 0"/>
+          <p:cNvSpPr/>
+          <p:nvPr/>
+        </p:nvSpPr>
+        <p:spPr>
+          <a:xfrm>
+            <a:off x="566928" y="329184"/>
+            <a:ext cx="10515600" cy="310896"/>
+          </a:xfrm>
+          <a:prstGeom prst="rect">
+            <a:avLst/>
+          </a:prstGeom>
+          <a:noFill/>
+          <a:ln/>
+        </p:spPr>
+        <p:txBody>
+          <a:bodyPr wrap="square" lIns="0" tIns="0" rIns="0" bIns="0" rtlCol="0" anchor="ctr"/>
+          <a:lstStyle/>
+          <a:p>
+            <a:pPr algn="l" indent="0" marL="0">
+              <a:buNone/>
+            </a:pPr>
+            <a:r>
+              <a:rPr lang="en-US" sz="1100" b="1" spc="150" kern="0" dirty="0">
+                <a:solidFill>
+                  <a:srgbClr val="AD1457"/>
+                </a:solidFill>
+                <a:latin typeface="Calibri" pitchFamily="34" charset="0"/>
+                <a:ea typeface="Calibri" pitchFamily="34" charset="-122"/>
+                <a:cs typeface="Calibri" pitchFamily="34" charset="-120"/>
+              </a:rPr>
+              <a:t>TRANSFUSION MEDICINE   ·   BOARD REVIEW  ·  Q3</a:t>
+            </a:r>
+            <a:endParaRPr lang="en-US" sz="1100" dirty="0"/>
+          </a:p>
+        </p:txBody>
+      </p:sp>
+      <p:sp>
+        <p:nvSpPr>
+          <p:cNvPr id="3" name="Text 1"/>
+          <p:cNvSpPr/>
+          <p:nvPr/>
+        </p:nvSpPr>
+        <p:spPr>
+          <a:xfrm>
+            <a:off x="566928" y="713232"/>
+            <a:ext cx="11064240" cy="749808"/>
+          </a:xfrm>
+          <a:prstGeom prst="rect">
+            <a:avLst/>
+          </a:prstGeom>
+          <a:noFill/>
+          <a:ln/>
+        </p:spPr>
+        <p:txBody>
+          <a:bodyPr wrap="square" lIns="0" tIns="0" rIns="0" bIns="0" rtlCol="0" anchor="ctr"/>
+          <a:lstStyle/>
+          <a:p>
+            <a:pPr algn="l" indent="0" marL="0">
+              <a:buNone/>
+            </a:pPr>
+            <a:r>
+              <a:rPr lang="en-US" sz="2600" b="1" dirty="0">
+                <a:solidFill>
+                  <a:srgbClr val="0E3A5F"/>
+                </a:solidFill>
+                <a:latin typeface="Calibri" pitchFamily="34" charset="0"/>
+                <a:ea typeface="Calibri" pitchFamily="34" charset="-122"/>
+                <a:cs typeface="Calibri" pitchFamily="34" charset="-120"/>
+              </a:rPr>
+              <a:t>Board-Style Review</a:t>
+            </a:r>
+            <a:endParaRPr lang="en-US" sz="2600" dirty="0"/>
+          </a:p>
+        </p:txBody>
+      </p:sp>
+      <p:sp>
+        <p:nvSpPr>
+          <p:cNvPr id="4" name="Text 2"/>
+          <p:cNvSpPr/>
+          <p:nvPr/>
+        </p:nvSpPr>
+        <p:spPr>
+          <a:xfrm>
+            <a:off x="566928" y="1417320"/>
+            <a:ext cx="11057839" cy="914400"/>
+          </a:xfrm>
+          <a:prstGeom prst="rect">
+            <a:avLst/>
+          </a:prstGeom>
+          <a:noFill/>
+          <a:ln/>
+        </p:spPr>
+        <p:txBody>
+          <a:bodyPr wrap="square" lIns="0" tIns="0" rIns="0" bIns="0" rtlCol="0" anchor="t"/>
+          <a:lstStyle/>
+          <a:p>
+            <a:pPr algn="l" indent="0" marL="0">
+              <a:lnSpc>
+                <a:spcPct val="105000"/>
+              </a:lnSpc>
+              <a:buNone/>
+            </a:pPr>
+            <a:r>
+              <a:rPr lang="en-US" sz="1450" b="1" dirty="0">
+                <a:solidFill>
+                  <a:srgbClr val="1B2A38"/>
+                </a:solidFill>
+                <a:latin typeface="Calibri" pitchFamily="34" charset="0"/>
+                <a:ea typeface="Calibri" pitchFamily="34" charset="-122"/>
+                <a:cs typeface="Calibri" pitchFamily="34" charset="-120"/>
+              </a:rPr>
+              <a:t>Which product modification is specifically required to prevent transfusion-associated graft-versus-host disease (TA-GVHD) in an at-risk recipient?</a:t>
+            </a:r>
+            <a:endParaRPr lang="en-US" sz="1450" dirty="0"/>
+          </a:p>
+        </p:txBody>
+      </p:sp>
+      <p:sp>
+        <p:nvSpPr>
+          <p:cNvPr id="5" name="Text 3"/>
+          <p:cNvSpPr/>
+          <p:nvPr/>
+        </p:nvSpPr>
+        <p:spPr>
+          <a:xfrm>
+            <a:off x="658368" y="2395728"/>
+            <a:ext cx="6192390" cy="3017520"/>
+          </a:xfrm>
+          <a:prstGeom prst="rect">
+            <a:avLst/>
+          </a:prstGeom>
+          <a:noFill/>
+          <a:ln/>
+        </p:spPr>
+        <p:txBody>
+          <a:bodyPr wrap="square" lIns="0" tIns="0" rIns="0" bIns="0" rtlCol="0" anchor="t"/>
+          <a:lstStyle/>
+          <a:p>
+            <a:pPr algn="l" indent="0" marL="0">
+              <a:spcAft>
+                <a:spcPts val="600"/>
+              </a:spcAft>
+              <a:buNone/>
+            </a:pPr>
+            <a:r>
+              <a:rPr lang="en-US" sz="1350" dirty="0">
+                <a:solidFill>
+                  <a:srgbClr val="33444F"/>
+                </a:solidFill>
+                <a:latin typeface="Calibri" pitchFamily="34" charset="0"/>
+                <a:ea typeface="Calibri" pitchFamily="34" charset="-122"/>
+                <a:cs typeface="Calibri" pitchFamily="34" charset="-120"/>
+              </a:rPr>
+              <a:t>A. Leukoreduction</a:t>
+            </a:r>
+            <a:endParaRPr lang="en-US" sz="1350" dirty="0"/>
+          </a:p>
+          <a:p>
+            <a:pPr algn="l" indent="0" marL="0">
+              <a:spcAft>
+                <a:spcPts val="600"/>
+              </a:spcAft>
+              <a:buNone/>
+            </a:pPr>
+            <a:r>
+              <a:rPr lang="en-US" sz="1350" dirty="0">
+                <a:solidFill>
+                  <a:srgbClr val="33444F"/>
+                </a:solidFill>
+                <a:latin typeface="Calibri" pitchFamily="34" charset="0"/>
+                <a:ea typeface="Calibri" pitchFamily="34" charset="-122"/>
+                <a:cs typeface="Calibri" pitchFamily="34" charset="-120"/>
+              </a:rPr>
+              <a:t>B. Washing</a:t>
+            </a:r>
+            <a:endParaRPr lang="en-US" sz="1350" dirty="0"/>
+          </a:p>
+          <a:p>
+            <a:pPr algn="l" indent="0" marL="0">
+              <a:spcAft>
+                <a:spcPts val="600"/>
+              </a:spcAft>
+              <a:buNone/>
+            </a:pPr>
+            <a:r>
+              <a:rPr lang="en-US" sz="1350" b="1" dirty="0">
+                <a:solidFill>
+                  <a:srgbClr val="7A0E3C"/>
+                </a:solidFill>
+                <a:latin typeface="Calibri" pitchFamily="34" charset="0"/>
+                <a:ea typeface="Calibri" pitchFamily="34" charset="-122"/>
+                <a:cs typeface="Calibri" pitchFamily="34" charset="-120"/>
+              </a:rPr>
+              <a:t>C. Irradiation of cellular components</a:t>
+            </a:r>
+            <a:endParaRPr lang="en-US" sz="1350" dirty="0"/>
+          </a:p>
+          <a:p>
+            <a:pPr algn="l" indent="0" marL="0">
+              <a:spcAft>
+                <a:spcPts val="600"/>
+              </a:spcAft>
+              <a:buNone/>
+            </a:pPr>
+            <a:r>
+              <a:rPr lang="en-US" sz="1350" dirty="0">
+                <a:solidFill>
+                  <a:srgbClr val="33444F"/>
+                </a:solidFill>
+                <a:latin typeface="Calibri" pitchFamily="34" charset="0"/>
+                <a:ea typeface="Calibri" pitchFamily="34" charset="-122"/>
+                <a:cs typeface="Calibri" pitchFamily="34" charset="-120"/>
+              </a:rPr>
+              <a:t>D. Use of IgA-deficient units</a:t>
+            </a:r>
+            <a:endParaRPr lang="en-US" sz="1350" dirty="0"/>
+          </a:p>
+          <a:p>
+            <a:pPr algn="l" indent="0" marL="0">
+              <a:spcAft>
+                <a:spcPts val="600"/>
+              </a:spcAft>
+              <a:buNone/>
+            </a:pPr>
+            <a:r>
+              <a:rPr lang="en-US" sz="1350" dirty="0">
+                <a:solidFill>
+                  <a:srgbClr val="33444F"/>
+                </a:solidFill>
+                <a:latin typeface="Calibri" pitchFamily="34" charset="0"/>
+                <a:ea typeface="Calibri" pitchFamily="34" charset="-122"/>
+                <a:cs typeface="Calibri" pitchFamily="34" charset="-120"/>
+              </a:rPr>
+              <a:t>E. Pathogen reduction for bacterial risk</a:t>
+            </a:r>
+            <a:endParaRPr lang="en-US" sz="1350" dirty="0"/>
+          </a:p>
+        </p:txBody>
+      </p:sp>
+      <p:sp>
+        <p:nvSpPr>
+          <p:cNvPr id="6" name="Shape 4"/>
+          <p:cNvSpPr/>
+          <p:nvPr/>
+        </p:nvSpPr>
+        <p:spPr>
+          <a:xfrm>
+            <a:off x="7201632" y="2395728"/>
+            <a:ext cx="4423136" cy="3246120"/>
+          </a:xfrm>
+          <a:prstGeom prst="roundRect">
+            <a:avLst>
+              <a:gd name="adj" fmla="val 2535"/>
+            </a:avLst>
+          </a:prstGeom>
+          <a:solidFill>
+            <a:srgbClr val="F8E7EF"/>
+          </a:solidFill>
+          <a:ln/>
+          <a:effectLst>
+            <a:outerShdw sx="100000" sy="100000" kx="0" ky="0" algn="bl" rotWithShape="0" blurRad="88900" dist="25400" dir="5400000">
+              <a:srgbClr val="22303C">
+                <a:alpha val="12000"/>
+              </a:srgbClr>
+            </a:outerShdw>
+          </a:effectLst>
+        </p:spPr>
+        <p:txBody>
+          <a:bodyPr/>
+          <a:p/>
+        </p:txBody>
+      </p:sp>
+      <p:sp>
+        <p:nvSpPr>
+          <p:cNvPr id="7" name="Text 5"/>
+          <p:cNvSpPr/>
+          <p:nvPr/>
+        </p:nvSpPr>
+        <p:spPr>
+          <a:xfrm>
+            <a:off x="7439376" y="2578608"/>
+            <a:ext cx="3965936" cy="457200"/>
+          </a:xfrm>
+          <a:prstGeom prst="rect">
+            <a:avLst/>
+          </a:prstGeom>
+          <a:noFill/>
+          <a:ln/>
+        </p:spPr>
+        <p:txBody>
+          <a:bodyPr wrap="square" lIns="0" tIns="0" rIns="0" bIns="0" rtlCol="0" anchor="ctr"/>
+          <a:lstStyle/>
+          <a:p>
+            <a:pPr indent="0" marL="0">
+              <a:buNone/>
+            </a:pPr>
+            <a:r>
+              <a:rPr lang="en-US" sz="1500" b="1" dirty="0">
+                <a:solidFill>
+                  <a:srgbClr val="AD1457"/>
+                </a:solidFill>
+                <a:latin typeface="Calibri" pitchFamily="34" charset="0"/>
+                <a:ea typeface="Calibri" pitchFamily="34" charset="-122"/>
+                <a:cs typeface="Calibri" pitchFamily="34" charset="-120"/>
+              </a:rPr>
+              <a:t>ANSWER  </a:t>
+            </a:r>
+            <a:pPr indent="0" marL="0">
+              <a:buNone/>
+            </a:pPr>
+            <a:r>
+              <a:rPr lang="en-US" sz="1500" b="1" dirty="0">
+                <a:solidFill>
+                  <a:srgbClr val="1B2A38"/>
+                </a:solidFill>
+                <a:latin typeface="Calibri" pitchFamily="34" charset="0"/>
+                <a:ea typeface="Calibri" pitchFamily="34" charset="-122"/>
+                <a:cs typeface="Calibri" pitchFamily="34" charset="-120"/>
+              </a:rPr>
+              <a:t>C — Irradiation of cellular components</a:t>
+            </a:r>
+            <a:endParaRPr lang="en-US" sz="1500" dirty="0"/>
+          </a:p>
+        </p:txBody>
+      </p:sp>
+      <p:sp>
+        <p:nvSpPr>
+          <p:cNvPr id="8" name="Text 6"/>
+          <p:cNvSpPr/>
+          <p:nvPr/>
+        </p:nvSpPr>
+        <p:spPr>
+          <a:xfrm>
+            <a:off x="7439376" y="3127248"/>
+            <a:ext cx="3947648" cy="2377440"/>
+          </a:xfrm>
+          <a:prstGeom prst="rect">
+            <a:avLst/>
+          </a:prstGeom>
+          <a:noFill/>
+          <a:ln/>
+        </p:spPr>
+        <p:txBody>
+          <a:bodyPr wrap="square" lIns="0" tIns="0" rIns="0" bIns="0" rtlCol="0" anchor="t"/>
+          <a:lstStyle/>
+          <a:p>
+            <a:pPr algn="l" indent="0" marL="0">
+              <a:lnSpc>
+                <a:spcPct val="108000"/>
+              </a:lnSpc>
+              <a:buNone/>
+            </a:pPr>
+            <a:r>
+              <a:rPr lang="en-US" sz="1250" dirty="0">
+                <a:solidFill>
+                  <a:srgbClr val="33444F"/>
+                </a:solidFill>
+                <a:latin typeface="Calibri" pitchFamily="34" charset="0"/>
+                <a:ea typeface="Calibri" pitchFamily="34" charset="-122"/>
+                <a:cs typeface="Calibri" pitchFamily="34" charset="-120"/>
+              </a:rPr>
+              <a:t>TA-GVHD is caused by viable donor T-lymphocytes; irradiation inactivates them and is the required preventive step. Leukoreduction reduces FNHTR, HLA alloimmunization, and CMV risk but does NOT reliably prevent TA-GVHD.</a:t>
+            </a:r>
+            <a:endParaRPr lang="en-US" sz="1250" dirty="0"/>
+          </a:p>
+        </p:txBody>
+      </p:sp>
+      <p:sp>
+        <p:nvSpPr>
+          <p:cNvPr id="9" name="Text 7"/>
+          <p:cNvSpPr/>
+          <p:nvPr/>
+        </p:nvSpPr>
+        <p:spPr>
+          <a:xfrm>
+            <a:off x="566928" y="6473952"/>
+            <a:ext cx="7772400" cy="274320"/>
+          </a:xfrm>
+          <a:prstGeom prst="rect">
+            <a:avLst/>
+          </a:prstGeom>
+          <a:noFill/>
+          <a:ln/>
+        </p:spPr>
+        <p:txBody>
+          <a:bodyPr wrap="square" lIns="0" tIns="0" rIns="0" bIns="0" rtlCol="0" anchor="ctr"/>
+          <a:lstStyle/>
+          <a:p>
+            <a:pPr algn="l" indent="0" marL="0">
+              <a:buNone/>
+            </a:pPr>
+            <a:r>
+              <a:rPr lang="en-US" sz="850" dirty="0">
+                <a:solidFill>
+                  <a:srgbClr val="9AA8B4"/>
+                </a:solidFill>
+                <a:latin typeface="Calibri" pitchFamily="34" charset="0"/>
+                <a:ea typeface="Calibri" pitchFamily="34" charset="-122"/>
+                <a:cs typeface="Calibri" pitchFamily="34" charset="-120"/>
+              </a:rPr>
+              <a:t>Makassed General Hospital  ·  Department of Laboratory Medicine</a:t>
+            </a:r>
+            <a:endParaRPr lang="en-US" sz="850" dirty="0"/>
+          </a:p>
+        </p:txBody>
+      </p:sp>
+      <p:sp>
+        <p:nvSpPr>
+          <p:cNvPr id="10" name="Text 8"/>
+          <p:cNvSpPr/>
+          <p:nvPr/>
+        </p:nvSpPr>
+        <p:spPr>
+          <a:xfrm>
+            <a:off x="9814255" y="6473952"/>
+            <a:ext cx="1828800" cy="274320"/>
+          </a:xfrm>
+          <a:prstGeom prst="rect">
+            <a:avLst/>
+          </a:prstGeom>
+          <a:noFill/>
+          <a:ln/>
+        </p:spPr>
+        <p:txBody>
+          <a:bodyPr wrap="square" lIns="0" tIns="0" rIns="0" bIns="0" rtlCol="0" anchor="ctr"/>
+          <a:lstStyle/>
+          <a:p>
+            <a:pPr algn="r" indent="0" marL="0">
+              <a:buNone/>
+            </a:pPr>
+            <a:r>
+              <a:rPr lang="en-US" sz="850" dirty="0">
+                <a:solidFill>
+                  <a:srgbClr val="9AA8B4"/>
+                </a:solidFill>
+                <a:latin typeface="Calibri" pitchFamily="34" charset="0"/>
+                <a:ea typeface="Calibri" pitchFamily="34" charset="-122"/>
+                <a:cs typeface="Calibri" pitchFamily="34" charset="-120"/>
+              </a:rPr>
+              <a:t>CP Lecture Series</a:t>
+            </a:r>
+            <a:pPr algn="r" indent="0" marL="0">
+              <a:buNone/>
+            </a:pPr>
+            <a:r>
+              <a:rPr lang="en-US" sz="850" dirty="0">
+                <a:solidFill>
+                  <a:srgbClr val="DCE4EC"/>
+                </a:solidFill>
+                <a:latin typeface="Calibri" pitchFamily="34" charset="0"/>
+                <a:ea typeface="Calibri" pitchFamily="34" charset="-122"/>
+                <a:cs typeface="Calibri" pitchFamily="34" charset="-120"/>
+              </a:rPr>
+              <a:t>   ·   </a:t>
+            </a:r>
+            <a:pPr algn="r" indent="0" marL="0">
+              <a:buNone/>
+            </a:pPr>
+            <a:r>
+              <a:rPr lang="en-US" sz="850" b="1" dirty="0">
+                <a:solidFill>
+                  <a:srgbClr val="AD1457"/>
+                </a:solidFill>
+                <a:latin typeface="Calibri" pitchFamily="34" charset="0"/>
+                <a:ea typeface="Calibri" pitchFamily="34" charset="-122"/>
+                <a:cs typeface="Calibri" pitchFamily="34" charset="-120"/>
+              </a:rPr>
+              <a:t>29</a:t>
+            </a:r>
+            <a:endParaRPr lang="en-US" sz="850" dirty="0"/>
+          </a:p>
+        </p:txBody>
+      </p:sp>
+    </p:spTree>
+  </p:cSld>
+  <p:clrMapOvr>
+    <a:masterClrMapping/>
+  </p:clrMapOvr>
+</p:sld>
+</file>
+
+<file path=ppt/slides/slide39.xml><?xml version="1.0" encoding="utf-8"?>
+<p:sld xmlns:a="http://schemas.openxmlformats.org/drawingml/2006/main" xmlns:p="http://schemas.openxmlformats.org/presentationml/2006/main" xmlns:r="http://schemas.openxmlformats.org/officeDocument/2006/relationships">
+  <p:cSld>
+    <p:spTree>
+      <p:nvGrpSpPr>
+        <p:cNvPr id="1" name=""/>
+        <p:cNvGrpSpPr/>
+        <p:nvPr/>
+      </p:nvGrpSpPr>
+      <p:grpSpPr/>
+      <p:sp>
+        <p:nvSpPr>
+          <p:cNvPr id="2" name="Text 0"/>
+          <p:cNvSpPr/>
+          <p:nvPr/>
+        </p:nvSpPr>
+        <p:spPr>
+          <a:xfrm>
+            <a:off x="566928" y="329184"/>
+            <a:ext cx="10515600" cy="310896"/>
+          </a:xfrm>
+          <a:prstGeom prst="rect">
+            <a:avLst/>
+          </a:prstGeom>
+          <a:noFill/>
+          <a:ln/>
+        </p:spPr>
+        <p:txBody>
+          <a:bodyPr wrap="square" lIns="0" tIns="0" rIns="0" bIns="0" rtlCol="0" anchor="ctr"/>
+          <a:lstStyle/>
+          <a:p>
+            <a:pPr algn="l" indent="0" marL="0">
+              <a:buNone/>
+            </a:pPr>
+            <a:r>
+              <a:rPr lang="en-US" sz="1100" b="1" spc="150" kern="0" dirty="0">
+                <a:solidFill>
+                  <a:srgbClr val="AD1457"/>
+                </a:solidFill>
+                <a:latin typeface="Calibri" pitchFamily="34" charset="0"/>
+                <a:ea typeface="Calibri" pitchFamily="34" charset="-122"/>
+                <a:cs typeface="Calibri" pitchFamily="34" charset="-120"/>
+              </a:rPr>
+              <a:t>TRANSFUSION MEDICINE   ·   BOARD REVIEW  ·  Q2</a:t>
+            </a:r>
+            <a:endParaRPr lang="en-US" sz="1100" dirty="0"/>
+          </a:p>
+        </p:txBody>
+      </p:sp>
+      <p:sp>
+        <p:nvSpPr>
+          <p:cNvPr id="3" name="Text 1"/>
+          <p:cNvSpPr/>
+          <p:nvPr/>
+        </p:nvSpPr>
+        <p:spPr>
+          <a:xfrm>
+            <a:off x="566928" y="713232"/>
+            <a:ext cx="11064240" cy="749808"/>
+          </a:xfrm>
+          <a:prstGeom prst="rect">
+            <a:avLst/>
+          </a:prstGeom>
+          <a:noFill/>
+          <a:ln/>
+        </p:spPr>
+        <p:txBody>
+          <a:bodyPr wrap="square" lIns="0" tIns="0" rIns="0" bIns="0" rtlCol="0" anchor="ctr"/>
+          <a:lstStyle/>
+          <a:p>
+            <a:pPr algn="l" indent="0" marL="0">
+              <a:buNone/>
+            </a:pPr>
+            <a:r>
+              <a:rPr lang="en-US" sz="2600" b="1" dirty="0">
+                <a:solidFill>
+                  <a:srgbClr val="0E3A5F"/>
+                </a:solidFill>
+                <a:latin typeface="Calibri" pitchFamily="34" charset="0"/>
+                <a:ea typeface="Calibri" pitchFamily="34" charset="-122"/>
+                <a:cs typeface="Calibri" pitchFamily="34" charset="-120"/>
+              </a:rPr>
+              <a:t>Board-Style Review</a:t>
+            </a:r>
+            <a:endParaRPr lang="en-US" sz="2600" dirty="0"/>
+          </a:p>
+        </p:txBody>
+      </p:sp>
+      <p:sp>
+        <p:nvSpPr>
+          <p:cNvPr id="4" name="Text 2"/>
+          <p:cNvSpPr/>
+          <p:nvPr/>
+        </p:nvSpPr>
+        <p:spPr>
+          <a:xfrm>
+            <a:off x="566928" y="1417320"/>
+            <a:ext cx="11057839" cy="914400"/>
+          </a:xfrm>
+          <a:prstGeom prst="rect">
+            <a:avLst/>
+          </a:prstGeom>
+          <a:noFill/>
+          <a:ln/>
+        </p:spPr>
+        <p:txBody>
+          <a:bodyPr wrap="square" lIns="0" tIns="0" rIns="0" bIns="0" rtlCol="0" anchor="t"/>
+          <a:lstStyle/>
+          <a:p>
+            <a:pPr algn="l" indent="0" marL="0">
+              <a:lnSpc>
+                <a:spcPct val="105000"/>
+              </a:lnSpc>
+              <a:buNone/>
+            </a:pPr>
+            <a:r>
+              <a:rPr lang="en-US" sz="1450" b="1" dirty="0">
+                <a:solidFill>
+                  <a:srgbClr val="1B2A38"/>
+                </a:solidFill>
+                <a:latin typeface="Calibri" pitchFamily="34" charset="0"/>
+                <a:ea typeface="Calibri" pitchFamily="34" charset="-122"/>
+                <a:cs typeface="Calibri" pitchFamily="34" charset="-120"/>
+              </a:rPr>
+              <a:t>Three hours after transfusion, a patient is dyspneic and hypoxemic with bilateral infiltrates. Blood pressure is 180/95, JVP is raised, and BNP is elevated. Which intervention is most appropriate?</a:t>
+            </a:r>
+            <a:endParaRPr lang="en-US" sz="1450" dirty="0"/>
+          </a:p>
+        </p:txBody>
+      </p:sp>
+      <p:sp>
+        <p:nvSpPr>
+          <p:cNvPr id="5" name="Text 3"/>
+          <p:cNvSpPr/>
+          <p:nvPr/>
+        </p:nvSpPr>
+        <p:spPr>
+          <a:xfrm>
+            <a:off x="658368" y="2395728"/>
+            <a:ext cx="6192390" cy="3017520"/>
+          </a:xfrm>
+          <a:prstGeom prst="rect">
+            <a:avLst/>
+          </a:prstGeom>
+          <a:noFill/>
+          <a:ln/>
+        </p:spPr>
+        <p:txBody>
+          <a:bodyPr wrap="square" lIns="0" tIns="0" rIns="0" bIns="0" rtlCol="0" anchor="t"/>
+          <a:lstStyle/>
+          <a:p>
+            <a:pPr algn="l" indent="0" marL="0">
+              <a:spcAft>
+                <a:spcPts val="600"/>
+              </a:spcAft>
+              <a:buNone/>
+            </a:pPr>
+            <a:r>
+              <a:rPr lang="en-US" sz="1350" dirty="0">
+                <a:solidFill>
+                  <a:srgbClr val="33444F"/>
+                </a:solidFill>
+                <a:latin typeface="Calibri" pitchFamily="34" charset="0"/>
+                <a:ea typeface="Calibri" pitchFamily="34" charset="-122"/>
+                <a:cs typeface="Calibri" pitchFamily="34" charset="-120"/>
+              </a:rPr>
+              <a:t>A. Intramuscular epinephrine</a:t>
+            </a:r>
+            <a:endParaRPr lang="en-US" sz="1350" dirty="0"/>
+          </a:p>
+          <a:p>
+            <a:pPr algn="l" indent="0" marL="0">
+              <a:spcAft>
+                <a:spcPts val="600"/>
+              </a:spcAft>
+              <a:buNone/>
+            </a:pPr>
+            <a:r>
+              <a:rPr lang="en-US" sz="1350" b="1" dirty="0">
+                <a:solidFill>
+                  <a:srgbClr val="7A0E3C"/>
+                </a:solidFill>
+                <a:latin typeface="Calibri" pitchFamily="34" charset="0"/>
+                <a:ea typeface="Calibri" pitchFamily="34" charset="-122"/>
+                <a:cs typeface="Calibri" pitchFamily="34" charset="-120"/>
+              </a:rPr>
+              <a:t>B. Diuresis, upright positioning, and oxygen</a:t>
+            </a:r>
+            <a:endParaRPr lang="en-US" sz="1350" dirty="0"/>
+          </a:p>
+          <a:p>
+            <a:pPr algn="l" indent="0" marL="0">
+              <a:spcAft>
+                <a:spcPts val="600"/>
+              </a:spcAft>
+              <a:buNone/>
+            </a:pPr>
+            <a:r>
+              <a:rPr lang="en-US" sz="1350" dirty="0">
+                <a:solidFill>
+                  <a:srgbClr val="33444F"/>
+                </a:solidFill>
+                <a:latin typeface="Calibri" pitchFamily="34" charset="0"/>
+                <a:ea typeface="Calibri" pitchFamily="34" charset="-122"/>
+                <a:cs typeface="Calibri" pitchFamily="34" charset="-120"/>
+              </a:rPr>
+              <a:t>C. Broad-spectrum antibiotics and culture of the unit</a:t>
+            </a:r>
+            <a:endParaRPr lang="en-US" sz="1350" dirty="0"/>
+          </a:p>
+          <a:p>
+            <a:pPr algn="l" indent="0" marL="0">
+              <a:spcAft>
+                <a:spcPts val="600"/>
+              </a:spcAft>
+              <a:buNone/>
+            </a:pPr>
+            <a:r>
+              <a:rPr lang="en-US" sz="1350" dirty="0">
+                <a:solidFill>
+                  <a:srgbClr val="33444F"/>
+                </a:solidFill>
+                <a:latin typeface="Calibri" pitchFamily="34" charset="0"/>
+                <a:ea typeface="Calibri" pitchFamily="34" charset="-122"/>
+                <a:cs typeface="Calibri" pitchFamily="34" charset="-120"/>
+              </a:rPr>
+              <a:t>D. Irradiated components for future transfusion</a:t>
+            </a:r>
+            <a:endParaRPr lang="en-US" sz="1350" dirty="0"/>
+          </a:p>
+          <a:p>
+            <a:pPr algn="l" indent="0" marL="0">
+              <a:spcAft>
+                <a:spcPts val="600"/>
+              </a:spcAft>
+              <a:buNone/>
+            </a:pPr>
+            <a:r>
+              <a:rPr lang="en-US" sz="1350" dirty="0">
+                <a:solidFill>
+                  <a:srgbClr val="33444F"/>
+                </a:solidFill>
+                <a:latin typeface="Calibri" pitchFamily="34" charset="0"/>
+                <a:ea typeface="Calibri" pitchFamily="34" charset="-122"/>
+                <a:cs typeface="Calibri" pitchFamily="34" charset="-120"/>
+              </a:rPr>
+              <a:t>E. Lung-protective ventilation without diuretics</a:t>
+            </a:r>
+            <a:endParaRPr lang="en-US" sz="1350" dirty="0"/>
+          </a:p>
+        </p:txBody>
+      </p:sp>
+      <p:sp>
+        <p:nvSpPr>
+          <p:cNvPr id="6" name="Shape 4"/>
+          <p:cNvSpPr/>
+          <p:nvPr/>
+        </p:nvSpPr>
+        <p:spPr>
+          <a:xfrm>
+            <a:off x="7201632" y="2395728"/>
+            <a:ext cx="4423136" cy="3246120"/>
+          </a:xfrm>
+          <a:prstGeom prst="roundRect">
+            <a:avLst>
+              <a:gd name="adj" fmla="val 2535"/>
+            </a:avLst>
+          </a:prstGeom>
+          <a:solidFill>
+            <a:srgbClr val="F8E7EF"/>
+          </a:solidFill>
+          <a:ln/>
+          <a:effectLst>
+            <a:outerShdw sx="100000" sy="100000" kx="0" ky="0" algn="bl" rotWithShape="0" blurRad="88900" dist="25400" dir="5400000">
+              <a:srgbClr val="22303C">
+                <a:alpha val="12000"/>
+              </a:srgbClr>
+            </a:outerShdw>
+          </a:effectLst>
+        </p:spPr>
+        <p:txBody>
+          <a:bodyPr/>
+          <a:p/>
+        </p:txBody>
+      </p:sp>
+      <p:sp>
+        <p:nvSpPr>
+          <p:cNvPr id="7" name="Text 5"/>
+          <p:cNvSpPr/>
+          <p:nvPr/>
+        </p:nvSpPr>
+        <p:spPr>
+          <a:xfrm>
+            <a:off x="7439376" y="2578608"/>
+            <a:ext cx="3965936" cy="457200"/>
+          </a:xfrm>
+          <a:prstGeom prst="rect">
+            <a:avLst/>
+          </a:prstGeom>
+          <a:noFill/>
+          <a:ln/>
+        </p:spPr>
+        <p:txBody>
+          <a:bodyPr wrap="square" lIns="0" tIns="0" rIns="0" bIns="0" rtlCol="0" anchor="ctr"/>
+          <a:lstStyle/>
+          <a:p>
+            <a:pPr indent="0" marL="0">
+              <a:buNone/>
+            </a:pPr>
+            <a:r>
+              <a:rPr lang="en-US" sz="1500" b="1" dirty="0">
+                <a:solidFill>
+                  <a:srgbClr val="AD1457"/>
+                </a:solidFill>
+                <a:latin typeface="Calibri" pitchFamily="34" charset="0"/>
+                <a:ea typeface="Calibri" pitchFamily="34" charset="-122"/>
+                <a:cs typeface="Calibri" pitchFamily="34" charset="-120"/>
+              </a:rPr>
+              <a:t>ANSWER  </a:t>
+            </a:r>
+            <a:pPr indent="0" marL="0">
+              <a:buNone/>
+            </a:pPr>
+            <a:r>
+              <a:rPr lang="en-US" sz="1500" b="1" dirty="0">
+                <a:solidFill>
+                  <a:srgbClr val="1B2A38"/>
+                </a:solidFill>
+                <a:latin typeface="Calibri" pitchFamily="34" charset="0"/>
+                <a:ea typeface="Calibri" pitchFamily="34" charset="-122"/>
+                <a:cs typeface="Calibri" pitchFamily="34" charset="-120"/>
+              </a:rPr>
+              <a:t>B — Diuresis, upright positioning, and oxygen</a:t>
+            </a:r>
+            <a:endParaRPr lang="en-US" sz="1500" dirty="0"/>
+          </a:p>
+        </p:txBody>
+      </p:sp>
+      <p:sp>
+        <p:nvSpPr>
+          <p:cNvPr id="8" name="Text 6"/>
+          <p:cNvSpPr/>
+          <p:nvPr/>
+        </p:nvSpPr>
+        <p:spPr>
+          <a:xfrm>
+            <a:off x="7439376" y="3127248"/>
+            <a:ext cx="3947648" cy="2377440"/>
+          </a:xfrm>
+          <a:prstGeom prst="rect">
+            <a:avLst/>
+          </a:prstGeom>
+          <a:noFill/>
+          <a:ln/>
+        </p:spPr>
+        <p:txBody>
+          <a:bodyPr wrap="square" lIns="0" tIns="0" rIns="0" bIns="0" rtlCol="0" anchor="t"/>
+          <a:lstStyle/>
+          <a:p>
+            <a:pPr algn="l" indent="0" marL="0">
+              <a:lnSpc>
+                <a:spcPct val="108000"/>
+              </a:lnSpc>
+              <a:buNone/>
+            </a:pPr>
+            <a:r>
+              <a:rPr lang="en-US" sz="1250" dirty="0">
+                <a:solidFill>
+                  <a:srgbClr val="33444F"/>
+                </a:solidFill>
+                <a:latin typeface="Calibri" pitchFamily="34" charset="0"/>
+                <a:ea typeface="Calibri" pitchFamily="34" charset="-122"/>
+                <a:cs typeface="Calibri" pitchFamily="34" charset="-120"/>
+              </a:rPr>
+              <a:t>Hypertension, raised JVP, and elevated BNP indicate TACO (hydrostatic overload), which responds to diuresis. (E) describes TRALI management; (C) septic; (A) anaphylaxis; (D) prevents TA-GVHD.</a:t>
+            </a:r>
+            <a:endParaRPr lang="en-US" sz="1250" dirty="0"/>
+          </a:p>
+        </p:txBody>
+      </p:sp>
+      <p:sp>
+        <p:nvSpPr>
+          <p:cNvPr id="9" name="Text 7"/>
+          <p:cNvSpPr/>
+          <p:nvPr/>
+        </p:nvSpPr>
+        <p:spPr>
+          <a:xfrm>
+            <a:off x="566928" y="6473952"/>
+            <a:ext cx="7772400" cy="274320"/>
+          </a:xfrm>
+          <a:prstGeom prst="rect">
+            <a:avLst/>
+          </a:prstGeom>
+          <a:noFill/>
+          <a:ln/>
+        </p:spPr>
+        <p:txBody>
+          <a:bodyPr wrap="square" lIns="0" tIns="0" rIns="0" bIns="0" rtlCol="0" anchor="ctr"/>
+          <a:lstStyle/>
+          <a:p>
+            <a:pPr algn="l" indent="0" marL="0">
+              <a:buNone/>
+            </a:pPr>
+            <a:r>
+              <a:rPr lang="en-US" sz="850" dirty="0">
+                <a:solidFill>
+                  <a:srgbClr val="9AA8B4"/>
+                </a:solidFill>
+                <a:latin typeface="Calibri" pitchFamily="34" charset="0"/>
+                <a:ea typeface="Calibri" pitchFamily="34" charset="-122"/>
+                <a:cs typeface="Calibri" pitchFamily="34" charset="-120"/>
+              </a:rPr>
+              <a:t>Makassed General Hospital  ·  Department of Laboratory Medicine</a:t>
+            </a:r>
+            <a:endParaRPr lang="en-US" sz="850" dirty="0"/>
+          </a:p>
+        </p:txBody>
+      </p:sp>
+      <p:sp>
+        <p:nvSpPr>
+          <p:cNvPr id="10" name="Text 8"/>
+          <p:cNvSpPr/>
+          <p:nvPr/>
+        </p:nvSpPr>
+        <p:spPr>
+          <a:xfrm>
+            <a:off x="9814255" y="6473952"/>
+            <a:ext cx="1828800" cy="274320"/>
+          </a:xfrm>
+          <a:prstGeom prst="rect">
+            <a:avLst/>
+          </a:prstGeom>
+          <a:noFill/>
+          <a:ln/>
+        </p:spPr>
+        <p:txBody>
+          <a:bodyPr wrap="square" lIns="0" tIns="0" rIns="0" bIns="0" rtlCol="0" anchor="ctr"/>
+          <a:lstStyle/>
+          <a:p>
+            <a:pPr algn="r" indent="0" marL="0">
+              <a:buNone/>
+            </a:pPr>
+            <a:r>
+              <a:rPr lang="en-US" sz="850" dirty="0">
+                <a:solidFill>
+                  <a:srgbClr val="9AA8B4"/>
+                </a:solidFill>
+                <a:latin typeface="Calibri" pitchFamily="34" charset="0"/>
+                <a:ea typeface="Calibri" pitchFamily="34" charset="-122"/>
+                <a:cs typeface="Calibri" pitchFamily="34" charset="-120"/>
+              </a:rPr>
+              <a:t>CP Lecture Series</a:t>
+            </a:r>
+            <a:pPr algn="r" indent="0" marL="0">
+              <a:buNone/>
+            </a:pPr>
+            <a:r>
+              <a:rPr lang="en-US" sz="850" dirty="0">
+                <a:solidFill>
+                  <a:srgbClr val="DCE4EC"/>
+                </a:solidFill>
+                <a:latin typeface="Calibri" pitchFamily="34" charset="0"/>
+                <a:ea typeface="Calibri" pitchFamily="34" charset="-122"/>
+                <a:cs typeface="Calibri" pitchFamily="34" charset="-120"/>
+              </a:rPr>
+              <a:t>   ·   </a:t>
+            </a:r>
+            <a:pPr algn="r" indent="0" marL="0">
+              <a:buNone/>
+            </a:pPr>
+            <a:r>
+              <a:rPr lang="en-US" sz="850" b="1" dirty="0">
+                <a:solidFill>
+                  <a:srgbClr val="AD1457"/>
+                </a:solidFill>
+                <a:latin typeface="Calibri" pitchFamily="34" charset="0"/>
+                <a:ea typeface="Calibri" pitchFamily="34" charset="-122"/>
+                <a:cs typeface="Calibri" pitchFamily="34" charset="-120"/>
+              </a:rPr>
+              <a:t>28</a:t>
+            </a:r>
+            <a:endParaRPr lang="en-US" sz="850" dirty="0"/>
+          </a:p>
+        </p:txBody>
+      </p:sp>
+    </p:spTree>
+  </p:cSld>
+  <p:clrMapOvr>
+    <a:masterClrMapping/>
+  </p:clrMapOvr>
+</p:sld>
+</file>
+
 <file path=ppt/slides/slide4.xml><?xml version="1.0" encoding="utf-8"?>
 <p:sld xmlns:a="http://schemas.openxmlformats.org/drawingml/2006/main" xmlns:r="http://schemas.openxmlformats.org/officeDocument/2006/relationships" xmlns:p="http://schemas.openxmlformats.org/presentationml/2006/main">
   <p:cSld name="Slide 4">
@@ -25476,6 +26355,10 @@
             </a:outerShdw>
           </a:effectLst>
         </p:spPr>
+        <p:txBody>
+          <a:bodyPr/>
+          <a:p/>
+        </p:txBody>
       </p:sp>
       <p:sp>
         <p:nvSpPr>
@@ -25503,6 +26386,10 @@
             </a:outerShdw>
           </a:effectLst>
         </p:spPr>
+        <p:txBody>
+          <a:bodyPr/>
+          <a:p/>
+        </p:txBody>
       </p:sp>
       <p:sp>
         <p:nvSpPr>
@@ -25617,6 +26504,10 @@
           </a:solidFill>
           <a:ln/>
         </p:spPr>
+        <p:txBody>
+          <a:bodyPr/>
+          <a:p/>
+        </p:txBody>
       </p:sp>
       <p:sp>
         <p:nvSpPr>
@@ -25644,6 +26535,10 @@
             </a:outerShdw>
           </a:effectLst>
         </p:spPr>
+        <p:txBody>
+          <a:bodyPr/>
+          <a:p/>
+        </p:txBody>
       </p:sp>
       <p:sp>
         <p:nvSpPr>
@@ -25765,6 +26660,10 @@
             </a:outerShdw>
           </a:effectLst>
         </p:spPr>
+        <p:txBody>
+          <a:bodyPr/>
+          <a:p/>
+        </p:txBody>
       </p:sp>
       <p:sp>
         <p:nvSpPr>
@@ -25792,6 +26691,10 @@
             </a:outerShdw>
           </a:effectLst>
         </p:spPr>
+        <p:txBody>
+          <a:bodyPr/>
+          <a:p/>
+        </p:txBody>
       </p:sp>
       <p:sp>
         <p:nvSpPr>
@@ -25906,6 +26809,10 @@
           </a:solidFill>
           <a:ln/>
         </p:spPr>
+        <p:txBody>
+          <a:bodyPr/>
+          <a:p/>
+        </p:txBody>
       </p:sp>
       <p:sp>
         <p:nvSpPr>
@@ -25933,6 +26840,10 @@
             </a:outerShdw>
           </a:effectLst>
         </p:spPr>
+        <p:txBody>
+          <a:bodyPr/>
+          <a:p/>
+        </p:txBody>
       </p:sp>
       <p:sp>
         <p:nvSpPr>
@@ -26054,6 +26965,10 @@
             </a:outerShdw>
           </a:effectLst>
         </p:spPr>
+        <p:txBody>
+          <a:bodyPr/>
+          <a:p/>
+        </p:txBody>
       </p:sp>
       <p:sp>
         <p:nvSpPr>
@@ -26081,6 +26996,10 @@
             </a:outerShdw>
           </a:effectLst>
         </p:spPr>
+        <p:txBody>
+          <a:bodyPr/>
+          <a:p/>
+        </p:txBody>
       </p:sp>
       <p:sp>
         <p:nvSpPr>
@@ -26275,6 +27194,500 @@
                 <a:cs typeface="Calibri" pitchFamily="34" charset="-120"/>
               </a:rPr>
               <a:t>4</a:t>
+            </a:r>
+            <a:endParaRPr lang="en-US" sz="850" dirty="0"/>
+          </a:p>
+        </p:txBody>
+      </p:sp>
+    </p:spTree>
+  </p:cSld>
+  <p:clrMapOvr>
+    <a:masterClrMapping/>
+  </p:clrMapOvr>
+</p:sld>
+</file>
+
+<file path=ppt/slides/slide40.xml><?xml version="1.0" encoding="utf-8"?>
+<p:sld xmlns:a="http://schemas.openxmlformats.org/drawingml/2006/main" xmlns:p="http://schemas.openxmlformats.org/presentationml/2006/main" xmlns:r="http://schemas.openxmlformats.org/officeDocument/2006/relationships">
+  <p:cSld>
+    <p:spTree>
+      <p:nvGrpSpPr>
+        <p:cNvPr id="1" name=""/>
+        <p:cNvGrpSpPr/>
+        <p:nvPr/>
+      </p:nvGrpSpPr>
+      <p:grpSpPr/>
+      <p:sp>
+        <p:nvSpPr>
+          <p:cNvPr id="2" name="Text 0"/>
+          <p:cNvSpPr/>
+          <p:nvPr/>
+        </p:nvSpPr>
+        <p:spPr>
+          <a:xfrm>
+            <a:off x="566928" y="329184"/>
+            <a:ext cx="10515600" cy="310896"/>
+          </a:xfrm>
+          <a:prstGeom prst="rect">
+            <a:avLst/>
+          </a:prstGeom>
+          <a:noFill/>
+          <a:ln/>
+        </p:spPr>
+        <p:txBody>
+          <a:bodyPr wrap="square" lIns="0" tIns="0" rIns="0" bIns="0" rtlCol="0" anchor="ctr"/>
+          <a:lstStyle/>
+          <a:p>
+            <a:pPr algn="l" indent="0" marL="0">
+              <a:buNone/>
+            </a:pPr>
+            <a:r>
+              <a:rPr lang="en-US" sz="1100" b="1" spc="150" kern="0" dirty="0">
+                <a:solidFill>
+                  <a:srgbClr val="AD1457"/>
+                </a:solidFill>
+                <a:latin typeface="Calibri" pitchFamily="34" charset="0"/>
+                <a:ea typeface="Calibri" pitchFamily="34" charset="-122"/>
+                <a:cs typeface="Calibri" pitchFamily="34" charset="-120"/>
+              </a:rPr>
+              <a:t>TRANSFUSION MEDICINE   ·   BOARD REVIEW  ·  Q1</a:t>
+            </a:r>
+            <a:endParaRPr lang="en-US" sz="1100" dirty="0"/>
+          </a:p>
+        </p:txBody>
+      </p:sp>
+      <p:sp>
+        <p:nvSpPr>
+          <p:cNvPr id="3" name="Text 1"/>
+          <p:cNvSpPr/>
+          <p:nvPr/>
+        </p:nvSpPr>
+        <p:spPr>
+          <a:xfrm>
+            <a:off x="566928" y="713232"/>
+            <a:ext cx="11064240" cy="749808"/>
+          </a:xfrm>
+          <a:prstGeom prst="rect">
+            <a:avLst/>
+          </a:prstGeom>
+          <a:noFill/>
+          <a:ln/>
+        </p:spPr>
+        <p:txBody>
+          <a:bodyPr wrap="square" lIns="0" tIns="0" rIns="0" bIns="0" rtlCol="0" anchor="ctr"/>
+          <a:lstStyle/>
+          <a:p>
+            <a:pPr algn="l" indent="0" marL="0">
+              <a:buNone/>
+            </a:pPr>
+            <a:r>
+              <a:rPr lang="en-US" sz="2600" b="1" dirty="0">
+                <a:solidFill>
+                  <a:srgbClr val="0E3A5F"/>
+                </a:solidFill>
+                <a:latin typeface="Calibri" pitchFamily="34" charset="0"/>
+                <a:ea typeface="Calibri" pitchFamily="34" charset="-122"/>
+                <a:cs typeface="Calibri" pitchFamily="34" charset="-120"/>
+              </a:rPr>
+              <a:t>Board-Style Review</a:t>
+            </a:r>
+            <a:endParaRPr lang="en-US" sz="2600" dirty="0"/>
+          </a:p>
+        </p:txBody>
+      </p:sp>
+      <p:sp>
+        <p:nvSpPr>
+          <p:cNvPr id="4" name="Text 2"/>
+          <p:cNvSpPr/>
+          <p:nvPr/>
+        </p:nvSpPr>
+        <p:spPr>
+          <a:xfrm>
+            <a:off x="566928" y="1417320"/>
+            <a:ext cx="11057839" cy="914400"/>
+          </a:xfrm>
+          <a:prstGeom prst="rect">
+            <a:avLst/>
+          </a:prstGeom>
+          <a:noFill/>
+          <a:ln/>
+        </p:spPr>
+        <p:txBody>
+          <a:bodyPr wrap="square" lIns="0" tIns="0" rIns="0" bIns="0" rtlCol="0" anchor="t"/>
+          <a:lstStyle/>
+          <a:p>
+            <a:pPr algn="l" indent="0" marL="0">
+              <a:lnSpc>
+                <a:spcPct val="105000"/>
+              </a:lnSpc>
+              <a:buNone/>
+            </a:pPr>
+            <a:r>
+              <a:rPr lang="en-US" sz="1450" b="1" dirty="0">
+                <a:solidFill>
+                  <a:srgbClr val="1B2A38"/>
+                </a:solidFill>
+                <a:latin typeface="Calibri" pitchFamily="34" charset="0"/>
+                <a:ea typeface="Calibri" pitchFamily="34" charset="-122"/>
+                <a:cs typeface="Calibri" pitchFamily="34" charset="-120"/>
+              </a:rPr>
+              <a:t>A patient develops fever, hypotension, and hemoglobinuria minutes after starting a red cell transfusion. Which single underlying error most commonly explains this reaction?</a:t>
+            </a:r>
+            <a:endParaRPr lang="en-US" sz="1450" dirty="0"/>
+          </a:p>
+        </p:txBody>
+      </p:sp>
+      <p:sp>
+        <p:nvSpPr>
+          <p:cNvPr id="5" name="Text 3"/>
+          <p:cNvSpPr/>
+          <p:nvPr/>
+        </p:nvSpPr>
+        <p:spPr>
+          <a:xfrm>
+            <a:off x="658368" y="2395728"/>
+            <a:ext cx="6192390" cy="3017520"/>
+          </a:xfrm>
+          <a:prstGeom prst="rect">
+            <a:avLst/>
+          </a:prstGeom>
+          <a:noFill/>
+          <a:ln/>
+        </p:spPr>
+        <p:txBody>
+          <a:bodyPr wrap="square" lIns="0" tIns="0" rIns="0" bIns="0" rtlCol="0" anchor="t"/>
+          <a:lstStyle/>
+          <a:p>
+            <a:pPr algn="l" indent="0" marL="0">
+              <a:spcAft>
+                <a:spcPts val="600"/>
+              </a:spcAft>
+              <a:buNone/>
+            </a:pPr>
+            <a:r>
+              <a:rPr lang="en-US" sz="1350" dirty="0">
+                <a:solidFill>
+                  <a:srgbClr val="33444F"/>
+                </a:solidFill>
+                <a:latin typeface="Calibri" pitchFamily="34" charset="0"/>
+                <a:ea typeface="Calibri" pitchFamily="34" charset="-122"/>
+                <a:cs typeface="Calibri" pitchFamily="34" charset="-120"/>
+              </a:rPr>
+              <a:t>A. A weak / evanescent Kidd antibody missed at crossmatch</a:t>
+            </a:r>
+            <a:endParaRPr lang="en-US" sz="1350" dirty="0"/>
+          </a:p>
+          <a:p>
+            <a:pPr algn="l" indent="0" marL="0">
+              <a:spcAft>
+                <a:spcPts val="600"/>
+              </a:spcAft>
+              <a:buNone/>
+            </a:pPr>
+            <a:r>
+              <a:rPr lang="en-US" sz="1350" dirty="0">
+                <a:solidFill>
+                  <a:srgbClr val="33444F"/>
+                </a:solidFill>
+                <a:latin typeface="Calibri" pitchFamily="34" charset="0"/>
+                <a:ea typeface="Calibri" pitchFamily="34" charset="-122"/>
+                <a:cs typeface="Calibri" pitchFamily="34" charset="-120"/>
+              </a:rPr>
+              <a:t>B. Bacterial contamination of the unit</a:t>
+            </a:r>
+            <a:endParaRPr lang="en-US" sz="1350" dirty="0"/>
+          </a:p>
+          <a:p>
+            <a:pPr algn="l" indent="0" marL="0">
+              <a:spcAft>
+                <a:spcPts val="600"/>
+              </a:spcAft>
+              <a:buNone/>
+            </a:pPr>
+            <a:r>
+              <a:rPr lang="en-US" sz="1350" b="1" dirty="0">
+                <a:solidFill>
+                  <a:srgbClr val="7A0E3C"/>
+                </a:solidFill>
+                <a:latin typeface="Calibri" pitchFamily="34" charset="0"/>
+                <a:ea typeface="Calibri" pitchFamily="34" charset="-122"/>
+                <a:cs typeface="Calibri" pitchFamily="34" charset="-120"/>
+              </a:rPr>
+              <a:t>C. Patient or sample misidentification causing ABO-incompatible transfusion</a:t>
+            </a:r>
+            <a:endParaRPr lang="en-US" sz="1350" dirty="0"/>
+          </a:p>
+          <a:p>
+            <a:pPr algn="l" indent="0" marL="0">
+              <a:spcAft>
+                <a:spcPts val="600"/>
+              </a:spcAft>
+              <a:buNone/>
+            </a:pPr>
+            <a:r>
+              <a:rPr lang="en-US" sz="1350" dirty="0">
+                <a:solidFill>
+                  <a:srgbClr val="33444F"/>
+                </a:solidFill>
+                <a:latin typeface="Calibri" pitchFamily="34" charset="0"/>
+                <a:ea typeface="Calibri" pitchFamily="34" charset="-122"/>
+                <a:cs typeface="Calibri" pitchFamily="34" charset="-120"/>
+              </a:rPr>
+              <a:t>D. Donor anti-HLA antibodies</a:t>
+            </a:r>
+            <a:endParaRPr lang="en-US" sz="1350" dirty="0"/>
+          </a:p>
+          <a:p>
+            <a:pPr algn="l" indent="0" marL="0">
+              <a:spcAft>
+                <a:spcPts val="600"/>
+              </a:spcAft>
+              <a:buNone/>
+            </a:pPr>
+            <a:r>
+              <a:rPr lang="en-US" sz="1350" dirty="0">
+                <a:solidFill>
+                  <a:srgbClr val="33444F"/>
+                </a:solidFill>
+                <a:latin typeface="Calibri" pitchFamily="34" charset="0"/>
+                <a:ea typeface="Calibri" pitchFamily="34" charset="-122"/>
+                <a:cs typeface="Calibri" pitchFamily="34" charset="-120"/>
+              </a:rPr>
+              <a:t>E. Recipient IgA deficiency with anti-IgA</a:t>
+            </a:r>
+            <a:endParaRPr lang="en-US" sz="1350" dirty="0"/>
+          </a:p>
+        </p:txBody>
+      </p:sp>
+      <p:sp>
+        <p:nvSpPr>
+          <p:cNvPr id="6" name="Shape 4"/>
+          <p:cNvSpPr/>
+          <p:nvPr/>
+        </p:nvSpPr>
+        <p:spPr>
+          <a:xfrm>
+            <a:off x="7201632" y="2395728"/>
+            <a:ext cx="4423136" cy="3246120"/>
+          </a:xfrm>
+          <a:prstGeom prst="roundRect">
+            <a:avLst>
+              <a:gd name="adj" fmla="val 2535"/>
+            </a:avLst>
+          </a:prstGeom>
+          <a:solidFill>
+            <a:srgbClr val="F8E7EF"/>
+          </a:solidFill>
+          <a:ln/>
+          <a:effectLst>
+            <a:outerShdw sx="100000" sy="100000" kx="0" ky="0" algn="bl" rotWithShape="0" blurRad="88900" dist="25400" dir="5400000">
+              <a:srgbClr val="22303C">
+                <a:alpha val="12000"/>
+              </a:srgbClr>
+            </a:outerShdw>
+          </a:effectLst>
+        </p:spPr>
+        <p:txBody>
+          <a:bodyPr/>
+          <a:p/>
+        </p:txBody>
+      </p:sp>
+      <p:sp>
+        <p:nvSpPr>
+          <p:cNvPr id="7" name="Text 5"/>
+          <p:cNvSpPr/>
+          <p:nvPr/>
+        </p:nvSpPr>
+        <p:spPr>
+          <a:xfrm>
+            <a:off x="7439376" y="2578608"/>
+            <a:ext cx="3965936" cy="457200"/>
+          </a:xfrm>
+          <a:prstGeom prst="rect">
+            <a:avLst/>
+          </a:prstGeom>
+          <a:noFill/>
+          <a:ln/>
+        </p:spPr>
+        <p:txBody>
+          <a:bodyPr wrap="square" lIns="0" tIns="0" rIns="0" bIns="0" rtlCol="0" anchor="ctr"/>
+          <a:lstStyle/>
+          <a:p>
+            <a:pPr indent="0" marL="0">
+              <a:buNone/>
+            </a:pPr>
+            <a:r>
+              <a:rPr lang="en-US" sz="1500" b="1" dirty="0">
+                <a:solidFill>
+                  <a:srgbClr val="AD1457"/>
+                </a:solidFill>
+                <a:latin typeface="Calibri" pitchFamily="34" charset="0"/>
+                <a:ea typeface="Calibri" pitchFamily="34" charset="-122"/>
+                <a:cs typeface="Calibri" pitchFamily="34" charset="-120"/>
+              </a:rPr>
+              <a:t>ANSWER  </a:t>
+            </a:r>
+            <a:pPr indent="0" marL="0">
+              <a:buNone/>
+            </a:pPr>
+            <a:r>
+              <a:rPr lang="en-US" sz="1500" b="1" dirty="0">
+                <a:solidFill>
+                  <a:srgbClr val="1B2A38"/>
+                </a:solidFill>
+                <a:latin typeface="Calibri" pitchFamily="34" charset="0"/>
+                <a:ea typeface="Calibri" pitchFamily="34" charset="-122"/>
+                <a:cs typeface="Calibri" pitchFamily="34" charset="-120"/>
+              </a:rPr>
+              <a:t>C — Patient/sample misidentification (ABO incompatibility)</a:t>
+            </a:r>
+            <a:endParaRPr lang="en-US" sz="1500" dirty="0"/>
+          </a:p>
+        </p:txBody>
+      </p:sp>
+      <p:sp>
+        <p:nvSpPr>
+          <p:cNvPr id="8" name="Text 6"/>
+          <p:cNvSpPr/>
+          <p:nvPr/>
+        </p:nvSpPr>
+        <p:spPr>
+          <a:xfrm>
+            <a:off x="7439376" y="3127248"/>
+            <a:ext cx="3947648" cy="2377440"/>
+          </a:xfrm>
+          <a:prstGeom prst="rect">
+            <a:avLst/>
+          </a:prstGeom>
+          <a:noFill/>
+          <a:ln/>
+        </p:spPr>
+        <p:txBody>
+          <a:bodyPr wrap="square" lIns="0" tIns="0" rIns="0" bIns="0" rtlCol="0" anchor="t"/>
+          <a:lstStyle/>
+          <a:p>
+            <a:pPr algn="l" indent="0" marL="0">
+              <a:lnSpc>
+                <a:spcPct val="108000"/>
+              </a:lnSpc>
+              <a:buNone/>
+            </a:pPr>
+            <a:r>
+              <a:rPr lang="en-US" sz="1250" dirty="0">
+                <a:solidFill>
+                  <a:srgbClr val="33444F"/>
+                </a:solidFill>
+                <a:latin typeface="Calibri" pitchFamily="34" charset="0"/>
+                <a:ea typeface="Calibri" pitchFamily="34" charset="-122"/>
+                <a:cs typeface="Calibri" pitchFamily="34" charset="-120"/>
+              </a:rPr>
+              <a:t>This is an acute hemolytic transfusion reaction. The overwhelming majority result from clerical / identification errors leading to ABO-incompatible transfusion. (A) causes delayed hemolysis; (B) is septic; (D) is TRALI; (E) is anaphylaxis.</a:t>
+            </a:r>
+            <a:endParaRPr lang="en-US" sz="1250" dirty="0"/>
+          </a:p>
+        </p:txBody>
+      </p:sp>
+      <p:sp>
+        <p:nvSpPr>
+          <p:cNvPr id="9" name="Text 7"/>
+          <p:cNvSpPr/>
+          <p:nvPr/>
+        </p:nvSpPr>
+        <p:spPr>
+          <a:xfrm>
+            <a:off x="566928" y="6473952"/>
+            <a:ext cx="7772400" cy="274320"/>
+          </a:xfrm>
+          <a:prstGeom prst="rect">
+            <a:avLst/>
+          </a:prstGeom>
+          <a:noFill/>
+          <a:ln/>
+        </p:spPr>
+        <p:txBody>
+          <a:bodyPr wrap="square" lIns="0" tIns="0" rIns="0" bIns="0" rtlCol="0" anchor="ctr"/>
+          <a:lstStyle/>
+          <a:p>
+            <a:pPr algn="l" indent="0" marL="0">
+              <a:buNone/>
+            </a:pPr>
+            <a:r>
+              <a:rPr lang="en-US" sz="850" dirty="0">
+                <a:solidFill>
+                  <a:srgbClr val="9AA8B4"/>
+                </a:solidFill>
+                <a:latin typeface="Calibri" pitchFamily="34" charset="0"/>
+                <a:ea typeface="Calibri" pitchFamily="34" charset="-122"/>
+                <a:cs typeface="Calibri" pitchFamily="34" charset="-120"/>
+              </a:rPr>
+              <a:t>Makassed General Hospital  ·  Department of Laboratory Medicine</a:t>
+            </a:r>
+            <a:endParaRPr lang="en-US" sz="850" dirty="0"/>
+          </a:p>
+        </p:txBody>
+      </p:sp>
+      <p:sp>
+        <p:nvSpPr>
+          <p:cNvPr id="10" name="Text 8"/>
+          <p:cNvSpPr/>
+          <p:nvPr/>
+        </p:nvSpPr>
+        <p:spPr>
+          <a:xfrm>
+            <a:off x="9814255" y="6473952"/>
+            <a:ext cx="1828800" cy="274320"/>
+          </a:xfrm>
+          <a:prstGeom prst="rect">
+            <a:avLst/>
+          </a:prstGeom>
+          <a:noFill/>
+          <a:ln/>
+        </p:spPr>
+        <p:txBody>
+          <a:bodyPr wrap="square" lIns="0" tIns="0" rIns="0" bIns="0" rtlCol="0" anchor="ctr"/>
+          <a:lstStyle/>
+          <a:p>
+            <a:pPr algn="r" indent="0" marL="0">
+              <a:buNone/>
+            </a:pPr>
+            <a:r>
+              <a:rPr lang="en-US" sz="850" dirty="0">
+                <a:solidFill>
+                  <a:srgbClr val="9AA8B4"/>
+                </a:solidFill>
+                <a:latin typeface="Calibri" pitchFamily="34" charset="0"/>
+                <a:ea typeface="Calibri" pitchFamily="34" charset="-122"/>
+                <a:cs typeface="Calibri" pitchFamily="34" charset="-120"/>
+              </a:rPr>
+              <a:t>CP Lecture Series</a:t>
+            </a:r>
+            <a:pPr algn="r" indent="0" marL="0">
+              <a:buNone/>
+            </a:pPr>
+            <a:r>
+              <a:rPr lang="en-US" sz="850" dirty="0">
+                <a:solidFill>
+                  <a:srgbClr val="DCE4EC"/>
+                </a:solidFill>
+                <a:latin typeface="Calibri" pitchFamily="34" charset="0"/>
+                <a:ea typeface="Calibri" pitchFamily="34" charset="-122"/>
+                <a:cs typeface="Calibri" pitchFamily="34" charset="-120"/>
+              </a:rPr>
+              <a:t>   ·   </a:t>
+            </a:r>
+            <a:pPr algn="r" indent="0" marL="0">
+              <a:buNone/>
+            </a:pPr>
+            <a:r>
+              <a:rPr lang="en-US" sz="850" b="1" dirty="0">
+                <a:solidFill>
+                  <a:srgbClr val="AD1457"/>
+                </a:solidFill>
+                <a:latin typeface="Calibri" pitchFamily="34" charset="0"/>
+                <a:ea typeface="Calibri" pitchFamily="34" charset="-122"/>
+                <a:cs typeface="Calibri" pitchFamily="34" charset="-120"/>
+              </a:rPr>
+              <a:t>27</a:t>
             </a:r>
             <a:endParaRPr lang="en-US" sz="850" dirty="0"/>
           </a:p>
@@ -26333,6 +27746,10 @@
           </a:solidFill>
           <a:ln/>
         </p:spPr>
+        <p:txBody>
+          <a:bodyPr/>
+          <a:p/>
+        </p:txBody>
       </p:sp>
       <p:sp>
         <p:nvSpPr>
@@ -26355,6 +27772,10 @@
           </a:solidFill>
           <a:ln/>
         </p:spPr>
+        <p:txBody>
+          <a:bodyPr/>
+          <a:p/>
+        </p:txBody>
       </p:sp>
       <p:sp>
         <p:nvSpPr>
@@ -26616,6 +28037,10 @@
             </a:outerShdw>
           </a:effectLst>
         </p:spPr>
+        <p:txBody>
+          <a:bodyPr/>
+          <a:p/>
+        </p:txBody>
       </p:sp>
       <p:sp>
         <p:nvSpPr>
@@ -26696,6 +28121,10 @@
             <a:tailEnd type="triangle"/>
           </a:ln>
         </p:spPr>
+        <p:txBody>
+          <a:bodyPr/>
+          <a:p/>
+        </p:txBody>
       </p:sp>
       <p:sp>
         <p:nvSpPr>
@@ -26730,6 +28159,10 @@
             </a:outerShdw>
           </a:effectLst>
         </p:spPr>
+        <p:txBody>
+          <a:bodyPr/>
+          <a:p/>
+        </p:txBody>
       </p:sp>
       <p:sp>
         <p:nvSpPr>
@@ -26810,6 +28243,10 @@
             <a:tailEnd type="triangle"/>
           </a:ln>
         </p:spPr>
+        <p:txBody>
+          <a:bodyPr/>
+          <a:p/>
+        </p:txBody>
       </p:sp>
       <p:sp>
         <p:nvSpPr>
@@ -26844,6 +28281,10 @@
             </a:outerShdw>
           </a:effectLst>
         </p:spPr>
+        <p:txBody>
+          <a:bodyPr/>
+          <a:p/>
+        </p:txBody>
       </p:sp>
       <p:sp>
         <p:nvSpPr>
@@ -26924,6 +28365,10 @@
             <a:tailEnd type="triangle"/>
           </a:ln>
         </p:spPr>
+        <p:txBody>
+          <a:bodyPr/>
+          <a:p/>
+        </p:txBody>
       </p:sp>
       <p:sp>
         <p:nvSpPr>
@@ -26958,6 +28403,10 @@
             </a:outerShdw>
           </a:effectLst>
         </p:spPr>
+        <p:txBody>
+          <a:bodyPr/>
+          <a:p/>
+        </p:txBody>
       </p:sp>
       <p:sp>
         <p:nvSpPr>
@@ -27038,6 +28487,10 @@
             <a:tailEnd type="triangle"/>
           </a:ln>
         </p:spPr>
+        <p:txBody>
+          <a:bodyPr/>
+          <a:p/>
+        </p:txBody>
       </p:sp>
       <p:sp>
         <p:nvSpPr>
@@ -27072,6 +28525,10 @@
             </a:outerShdw>
           </a:effectLst>
         </p:spPr>
+        <p:txBody>
+          <a:bodyPr/>
+          <a:p/>
+        </p:txBody>
       </p:sp>
       <p:sp>
         <p:nvSpPr>
@@ -27179,6 +28636,10 @@
             </a:outerShdw>
           </a:effectLst>
         </p:spPr>
+        <p:txBody>
+          <a:bodyPr/>
+          <a:p/>
+        </p:txBody>
       </p:sp>
       <p:sp>
         <p:nvSpPr>
@@ -27289,6 +28750,10 @@
             </a:outerShdw>
           </a:effectLst>
         </p:spPr>
+        <p:txBody>
+          <a:bodyPr/>
+          <a:p/>
+        </p:txBody>
       </p:sp>
       <p:sp>
         <p:nvSpPr>
@@ -27615,6 +29080,10 @@
             </a:outerShdw>
           </a:effectLst>
         </p:spPr>
+        <p:txBody>
+          <a:bodyPr/>
+          <a:p/>
+        </p:txBody>
       </p:sp>
       <p:sp>
         <p:nvSpPr>
@@ -27789,6 +29258,10 @@
             </a:outerShdw>
           </a:effectLst>
         </p:spPr>
+        <p:txBody>
+          <a:bodyPr/>
+          <a:p/>
+        </p:txBody>
       </p:sp>
       <p:sp>
         <p:nvSpPr>
@@ -27963,6 +29436,10 @@
             </a:outerShdw>
           </a:effectLst>
         </p:spPr>
+        <p:txBody>
+          <a:bodyPr/>
+          <a:p/>
+        </p:txBody>
       </p:sp>
       <p:sp>
         <p:nvSpPr>
@@ -28137,6 +29614,10 @@
             </a:outerShdw>
           </a:effectLst>
         </p:spPr>
+        <p:txBody>
+          <a:bodyPr/>
+          <a:p/>
+        </p:txBody>
       </p:sp>
       <p:sp>
         <p:nvSpPr>
@@ -28490,6 +29971,10 @@
             </a:outerShdw>
           </a:effectLst>
         </p:spPr>
+        <p:txBody>
+          <a:bodyPr/>
+          <a:p/>
+        </p:txBody>
       </p:sp>
       <p:sp>
         <p:nvSpPr>
@@ -28570,6 +30055,10 @@
             <a:tailEnd type="triangle"/>
           </a:ln>
         </p:spPr>
+        <p:txBody>
+          <a:bodyPr/>
+          <a:p/>
+        </p:txBody>
       </p:sp>
       <p:sp>
         <p:nvSpPr>
@@ -28604,6 +30093,10 @@
             </a:outerShdw>
           </a:effectLst>
         </p:spPr>
+        <p:txBody>
+          <a:bodyPr/>
+          <a:p/>
+        </p:txBody>
       </p:sp>
       <p:sp>
         <p:nvSpPr>
@@ -28684,6 +30177,10 @@
             <a:tailEnd type="triangle"/>
           </a:ln>
         </p:spPr>
+        <p:txBody>
+          <a:bodyPr/>
+          <a:p/>
+        </p:txBody>
       </p:sp>
       <p:sp>
         <p:nvSpPr>
@@ -28718,6 +30215,10 @@
             </a:outerShdw>
           </a:effectLst>
         </p:spPr>
+        <p:txBody>
+          <a:bodyPr/>
+          <a:p/>
+        </p:txBody>
       </p:sp>
       <p:sp>
         <p:nvSpPr>
@@ -28847,6 +30348,10 @@
             </a:outerShdw>
           </a:effectLst>
         </p:spPr>
+        <p:txBody>
+          <a:bodyPr/>
+          <a:p/>
+        </p:txBody>
       </p:sp>
       <p:sp>
         <p:nvSpPr>
@@ -29026,6 +30531,10 @@
             </a:outerShdw>
           </a:effectLst>
         </p:spPr>
+        <p:txBody>
+          <a:bodyPr/>
+          <a:p/>
+        </p:txBody>
       </p:sp>
       <p:sp>
         <p:nvSpPr>
@@ -29331,6 +30840,10 @@
           </a:solidFill>
           <a:ln/>
         </p:spPr>
+        <p:txBody>
+          <a:bodyPr/>
+          <a:p/>
+        </p:txBody>
       </p:sp>
       <p:sp>
         <p:nvSpPr>
@@ -29353,6 +30866,10 @@
           </a:solidFill>
           <a:ln/>
         </p:spPr>
+        <p:txBody>
+          <a:bodyPr/>
+          <a:p/>
+        </p:txBody>
       </p:sp>
       <p:sp>
         <p:nvSpPr>
